--- a/0911_related_work_fairness_audits.pptx
+++ b/0911_related_work_fairness_audits.pptx
@@ -4364,41 +4364,50 @@
           </a:p>
         </p:txBody>
       </p:sp>
-      <p:cxnSp>
-        <p:nvCxnSpPr>
-          <p:cNvPr id="4" name="Connector 3"/>
-          <p:cNvCxnSpPr/>
+      <p:sp>
+        <p:nvSpPr>
+          <p:cNvPr id="4" name="Rectangle 3"/>
+          <p:cNvSpPr/>
           <p:nvPr/>
-        </p:nvCxnSpPr>
+        </p:nvSpPr>
         <p:spPr>
           <a:xfrm>
             <a:off x="548640" y="1325880"/>
-            <a:ext cx="11091672" cy="0"/>
-          </a:xfrm>
-          <a:prstGeom prst="line">
+            <a:ext cx="11091672" cy="10972"/>
+          </a:xfrm>
+          <a:prstGeom prst="rect">
             <a:avLst/>
           </a:prstGeom>
-          <a:ln w="9525">
-            <a:solidFill>
-              <a:srgbClr val="C6D0CC"/>
-            </a:solidFill>
+          <a:solidFill>
+            <a:srgbClr val="C6D0CC"/>
+          </a:solidFill>
+          <a:ln>
+            <a:noFill/>
           </a:ln>
+          <a:effectLst/>
         </p:spPr>
         <p:style>
-          <a:lnRef idx="2">
+          <a:lnRef idx="1">
             <a:schemeClr val="accent1"/>
           </a:lnRef>
-          <a:fillRef idx="0">
+          <a:fillRef idx="3">
             <a:schemeClr val="accent1"/>
           </a:fillRef>
-          <a:effectRef idx="1">
+          <a:effectRef idx="2">
             <a:schemeClr val="accent1"/>
           </a:effectRef>
           <a:fontRef idx="minor">
-            <a:schemeClr val="tx1"/>
+            <a:schemeClr val="lt1"/>
           </a:fontRef>
         </p:style>
-      </p:cxnSp>
+        <p:txBody>
+          <a:bodyPr rtlCol="0" anchor="ctr"/>
+          <a:lstStyle/>
+          <a:p>
+            <a:pPr algn="ctr"/>
+          </a:p>
+        </p:txBody>
+      </p:sp>
       <p:sp>
         <p:nvSpPr>
           <p:cNvPr id="5" name="TextBox 4"/>
@@ -5321,513 +5330,22 @@
           </a:p>
         </p:txBody>
       </p:sp>
-      <p:cxnSp>
-        <p:nvCxnSpPr>
-          <p:cNvPr id="4" name="Connector 3"/>
-          <p:cNvCxnSpPr/>
-          <p:nvPr/>
-        </p:nvCxnSpPr>
-        <p:spPr>
-          <a:xfrm>
-            <a:off x="548640" y="1325880"/>
-            <a:ext cx="11091672" cy="0"/>
-          </a:xfrm>
-          <a:prstGeom prst="line">
-            <a:avLst/>
-          </a:prstGeom>
-          <a:ln w="9525">
-            <a:solidFill>
-              <a:srgbClr val="C6D0CC"/>
-            </a:solidFill>
-          </a:ln>
-        </p:spPr>
-        <p:style>
-          <a:lnRef idx="2">
-            <a:schemeClr val="accent1"/>
-          </a:lnRef>
-          <a:fillRef idx="0">
-            <a:schemeClr val="accent1"/>
-          </a:fillRef>
-          <a:effectRef idx="1">
-            <a:schemeClr val="accent1"/>
-          </a:effectRef>
-          <a:fontRef idx="minor">
-            <a:schemeClr val="tx1"/>
-          </a:fontRef>
-        </p:style>
-      </p:cxnSp>
-      <p:sp>
-        <p:nvSpPr>
-          <p:cNvPr id="5" name="TextBox 4"/>
-          <p:cNvSpPr txBox="1"/>
-          <p:nvPr/>
-        </p:nvSpPr>
-        <p:spPr>
-          <a:xfrm>
-            <a:off x="10881360" y="6446520"/>
-            <a:ext cx="758952" cy="228600"/>
-          </a:xfrm>
-          <a:prstGeom prst="rect">
-            <a:avLst/>
-          </a:prstGeom>
-          <a:noFill/>
-        </p:spPr>
-        <p:txBody>
-          <a:bodyPr wrap="square" lIns="0" rIns="0" tIns="0" bIns="0" anchor="t">
-            <a:spAutoFit/>
-          </a:bodyPr>
-          <a:lstStyle/>
-          <a:p>
-            <a:pPr algn="r"/>
-            <a:r>
-              <a:rPr sz="1000" b="0" i="0">
-                <a:solidFill>
-                  <a:srgbClr val="5B6964"/>
-                </a:solidFill>
-                <a:latin typeface="Arial"/>
-              </a:rPr>
-              <a:t>3</a:t>
-            </a:r>
-          </a:p>
-        </p:txBody>
-      </p:sp>
-      <p:sp>
-        <p:nvSpPr>
-          <p:cNvPr id="6" name="TextBox 5"/>
-          <p:cNvSpPr txBox="1"/>
-          <p:nvPr/>
-        </p:nvSpPr>
-        <p:spPr>
-          <a:xfrm>
-            <a:off x="548640" y="6446520"/>
-            <a:ext cx="7315200" cy="228600"/>
-          </a:xfrm>
-          <a:prstGeom prst="rect">
-            <a:avLst/>
-          </a:prstGeom>
-          <a:noFill/>
-        </p:spPr>
-        <p:txBody>
-          <a:bodyPr wrap="square" lIns="0" rIns="0" tIns="0" bIns="0" anchor="t">
-            <a:spAutoFit/>
-          </a:bodyPr>
-          <a:lstStyle/>
-          <a:p>
-            <a:pPr algn="l"/>
-            <a:r>
-              <a:rPr sz="1000" b="0" i="0">
-                <a:solidFill>
-                  <a:srgbClr val="5B6964"/>
-                </a:solidFill>
-                <a:latin typeface="Arial"/>
-              </a:rPr>
-              <a:t>Related work for FAIR-TRACE / SCAFF · 2026-09-11</a:t>
-            </a:r>
-          </a:p>
-        </p:txBody>
-      </p:sp>
-      <p:sp>
-        <p:nvSpPr>
-          <p:cNvPr id="7" name="TextBox 6"/>
-          <p:cNvSpPr txBox="1"/>
-          <p:nvPr/>
-        </p:nvSpPr>
-        <p:spPr>
-          <a:xfrm>
-            <a:off x="548640" y="1536192"/>
-            <a:ext cx="7406640" cy="457200"/>
-          </a:xfrm>
-          <a:prstGeom prst="rect">
-            <a:avLst/>
-          </a:prstGeom>
-          <a:noFill/>
-        </p:spPr>
-        <p:txBody>
-          <a:bodyPr wrap="square" lIns="0" rIns="0" tIns="0" bIns="0" anchor="t">
-            <a:spAutoFit/>
-          </a:bodyPr>
-          <a:lstStyle/>
-          <a:p>
-            <a:pPr algn="l"/>
-            <a:r>
-              <a:rPr sz="1500" b="1" i="0">
-                <a:solidFill>
-                  <a:srgbClr val="1E7568"/>
-                </a:solidFill>
-                <a:latin typeface="Arial"/>
-              </a:rPr>
-              <a:t>Question  </a:t>
-            </a:r>
-            <a:r>
-              <a:rPr sz="1500" b="0" i="0">
-                <a:solidFill>
-                  <a:srgbClr val="18211F"/>
-                </a:solidFill>
-                <a:latin typeface="Arial"/>
-              </a:rPr>
-              <a:t>Does ChatGPT change its recommendations when the user states a sensitive attribute?</a:t>
-            </a:r>
-          </a:p>
-        </p:txBody>
-      </p:sp>
-      <p:sp>
-        <p:nvSpPr>
-          <p:cNvPr id="8" name="TextBox 7"/>
-          <p:cNvSpPr txBox="1"/>
-          <p:nvPr/>
-        </p:nvSpPr>
-        <p:spPr>
-          <a:xfrm>
-            <a:off x="548640" y="2148840"/>
-            <a:ext cx="7406640" cy="228600"/>
-          </a:xfrm>
-          <a:prstGeom prst="rect">
-            <a:avLst/>
-          </a:prstGeom>
-          <a:noFill/>
-        </p:spPr>
-        <p:txBody>
-          <a:bodyPr wrap="square" lIns="0" rIns="0" tIns="0" bIns="0" anchor="t">
-            <a:spAutoFit/>
-          </a:bodyPr>
-          <a:lstStyle/>
-          <a:p>
-            <a:pPr algn="l"/>
-            <a:r>
-              <a:rPr sz="1050" b="1" i="0">
-                <a:solidFill>
-                  <a:srgbClr val="5B6964"/>
-                </a:solidFill>
-                <a:latin typeface="Arial"/>
-              </a:rPr>
-              <a:t>SETUP</a:t>
-            </a:r>
-          </a:p>
-        </p:txBody>
-      </p:sp>
-      <p:sp>
-        <p:nvSpPr>
-          <p:cNvPr id="9" name="TextBox 8"/>
-          <p:cNvSpPr txBox="1"/>
-          <p:nvPr/>
-        </p:nvSpPr>
-        <p:spPr>
-          <a:xfrm>
-            <a:off x="548640" y="2423160"/>
-            <a:ext cx="7406640" cy="1143000"/>
-          </a:xfrm>
-          <a:prstGeom prst="rect">
-            <a:avLst/>
-          </a:prstGeom>
-          <a:noFill/>
-        </p:spPr>
-        <p:txBody>
-          <a:bodyPr wrap="square" lIns="0" rIns="0" tIns="0" bIns="0">
-            <a:spAutoFit/>
-          </a:bodyPr>
-          <a:lstStyle/>
-          <a:p>
-            <a:pPr marL="201168" indent="-201168">
-              <a:spcAft>
-                <a:spcPts val="500"/>
-              </a:spcAft>
-              <a:buClr>
-                <a:srgbClr val="1E7568"/>
-              </a:buClr>
-              <a:buFont typeface="Arial"/>
-              <a:buChar char="•"/>
-            </a:pPr>
-            <a:r>
-              <a:rPr sz="1350" b="0">
-                <a:solidFill>
-                  <a:srgbClr val="18211F"/>
-                </a:solidFill>
-                <a:latin typeface="Arial"/>
-              </a:rPr>
-              <a:t>Music (500 popular singers) and movies (500 top directors); request K = 20 titles</a:t>
-            </a:r>
-          </a:p>
-          <a:p>
-            <a:pPr marL="201168" indent="-201168">
-              <a:spcAft>
-                <a:spcPts val="500"/>
-              </a:spcAft>
-              <a:buClr>
-                <a:srgbClr val="1E7568"/>
-              </a:buClr>
-              <a:buFont typeface="Arial"/>
-              <a:buChar char="•"/>
-            </a:pPr>
-            <a:r>
-              <a:rPr sz="1350" b="0">
-                <a:solidFill>
-                  <a:srgbClr val="18211F"/>
-                </a:solidFill>
-                <a:latin typeface="Arial"/>
-              </a:rPr>
-              <a:t>8 attributes: age, country, gender, continent, occupation, race, religion, physical traits</a:t>
-            </a:r>
-          </a:p>
-          <a:p>
-            <a:pPr marL="201168" indent="-201168">
-              <a:spcAft>
-                <a:spcPts val="500"/>
-              </a:spcAft>
-              <a:buClr>
-                <a:srgbClr val="1E7568"/>
-              </a:buClr>
-              <a:buFont typeface="Arial"/>
-              <a:buChar char="•"/>
-            </a:pPr>
-            <a:r>
-              <a:rPr sz="1350" b="0">
-                <a:solidFill>
-                  <a:srgbClr val="18211F"/>
-                </a:solidFill>
-                <a:latin typeface="Arial"/>
-              </a:rPr>
-              <a:t>Neutral prompt “I am a fan of X” vs. “I am a/an [attribute] fan of X”; greedy decoding</a:t>
-            </a:r>
-          </a:p>
-        </p:txBody>
-      </p:sp>
-      <p:sp>
-        <p:nvSpPr>
-          <p:cNvPr id="10" name="TextBox 9"/>
-          <p:cNvSpPr txBox="1"/>
-          <p:nvPr/>
-        </p:nvSpPr>
-        <p:spPr>
-          <a:xfrm>
-            <a:off x="548640" y="3675887"/>
-            <a:ext cx="7406640" cy="228600"/>
-          </a:xfrm>
-          <a:prstGeom prst="rect">
-            <a:avLst/>
-          </a:prstGeom>
-          <a:noFill/>
-        </p:spPr>
-        <p:txBody>
-          <a:bodyPr wrap="square" lIns="0" rIns="0" tIns="0" bIns="0" anchor="t">
-            <a:spAutoFit/>
-          </a:bodyPr>
-          <a:lstStyle/>
-          <a:p>
-            <a:pPr algn="l"/>
-            <a:r>
-              <a:rPr sz="1050" b="1" i="0">
-                <a:solidFill>
-                  <a:srgbClr val="5B6964"/>
-                </a:solidFill>
-                <a:latin typeface="Arial"/>
-              </a:rPr>
-              <a:t>METRICS</a:t>
-            </a:r>
-          </a:p>
-        </p:txBody>
-      </p:sp>
-      <p:sp>
-        <p:nvSpPr>
-          <p:cNvPr id="11" name="TextBox 10"/>
-          <p:cNvSpPr txBox="1"/>
-          <p:nvPr/>
-        </p:nvSpPr>
-        <p:spPr>
-          <a:xfrm>
-            <a:off x="548640" y="3950207"/>
-            <a:ext cx="7406640" cy="731520"/>
-          </a:xfrm>
-          <a:prstGeom prst="rect">
-            <a:avLst/>
-          </a:prstGeom>
-          <a:noFill/>
-        </p:spPr>
-        <p:txBody>
-          <a:bodyPr wrap="square" lIns="0" rIns="0" tIns="0" bIns="0">
-            <a:spAutoFit/>
-          </a:bodyPr>
-          <a:lstStyle/>
-          <a:p>
-            <a:pPr marL="201168" indent="-201168">
-              <a:spcAft>
-                <a:spcPts val="500"/>
-              </a:spcAft>
-              <a:buClr>
-                <a:srgbClr val="1E7568"/>
-              </a:buClr>
-              <a:buFont typeface="Arial"/>
-              <a:buChar char="•"/>
-            </a:pPr>
-            <a:r>
-              <a:rPr sz="1350" b="0">
-                <a:solidFill>
-                  <a:srgbClr val="18211F"/>
-                </a:solidFill>
-                <a:latin typeface="Arial"/>
-              </a:rPr>
-              <a:t>Similarity of each attribute's list to the neutral list: Jaccard, SERP*, PRAG*</a:t>
-            </a:r>
-          </a:p>
-          <a:p>
-            <a:pPr marL="201168" indent="-201168">
-              <a:spcAft>
-                <a:spcPts val="500"/>
-              </a:spcAft>
-              <a:buClr>
-                <a:srgbClr val="1E7568"/>
-              </a:buClr>
-              <a:buFont typeface="Arial"/>
-              <a:buChar char="•"/>
-            </a:pPr>
-            <a:r>
-              <a:rPr sz="1350" b="0">
-                <a:solidFill>
-                  <a:srgbClr val="18211F"/>
-                </a:solidFill>
-                <a:latin typeface="Arial"/>
-              </a:rPr>
-              <a:t>Unfairness = spread across values: SNSR (max − min) and SNSV (std)</a:t>
-            </a:r>
-          </a:p>
-        </p:txBody>
-      </p:sp>
-      <p:sp>
-        <p:nvSpPr>
-          <p:cNvPr id="12" name="TextBox 11"/>
-          <p:cNvSpPr txBox="1"/>
-          <p:nvPr/>
-        </p:nvSpPr>
-        <p:spPr>
-          <a:xfrm>
-            <a:off x="548640" y="4791456"/>
-            <a:ext cx="7406640" cy="228600"/>
-          </a:xfrm>
-          <a:prstGeom prst="rect">
-            <a:avLst/>
-          </a:prstGeom>
-          <a:noFill/>
-        </p:spPr>
-        <p:txBody>
-          <a:bodyPr wrap="square" lIns="0" rIns="0" tIns="0" bIns="0" anchor="t">
-            <a:spAutoFit/>
-          </a:bodyPr>
-          <a:lstStyle/>
-          <a:p>
-            <a:pPr algn="l"/>
-            <a:r>
-              <a:rPr sz="1050" b="1" i="0">
-                <a:solidFill>
-                  <a:srgbClr val="5B6964"/>
-                </a:solidFill>
-                <a:latin typeface="Arial"/>
-              </a:rPr>
-              <a:t>FINDINGS</a:t>
-            </a:r>
-          </a:p>
-        </p:txBody>
-      </p:sp>
-      <p:sp>
-        <p:nvSpPr>
-          <p:cNvPr id="13" name="TextBox 12"/>
-          <p:cNvSpPr txBox="1"/>
-          <p:nvPr/>
-        </p:nvSpPr>
-        <p:spPr>
-          <a:xfrm>
-            <a:off x="548640" y="5065776"/>
-            <a:ext cx="7406640" cy="1143000"/>
-          </a:xfrm>
-          <a:prstGeom prst="rect">
-            <a:avLst/>
-          </a:prstGeom>
-          <a:noFill/>
-        </p:spPr>
-        <p:txBody>
-          <a:bodyPr wrap="square" lIns="0" rIns="0" tIns="0" bIns="0">
-            <a:spAutoFit/>
-          </a:bodyPr>
-          <a:lstStyle/>
-          <a:p>
-            <a:pPr marL="201168" indent="-201168">
-              <a:spcAft>
-                <a:spcPts val="500"/>
-              </a:spcAft>
-              <a:buClr>
-                <a:srgbClr val="1E7568"/>
-              </a:buClr>
-              <a:buFont typeface="Arial"/>
-              <a:buChar char="•"/>
-            </a:pPr>
-            <a:r>
-              <a:rPr sz="1350" b="0">
-                <a:solidFill>
-                  <a:srgbClr val="18211F"/>
-                </a:solidFill>
-                <a:latin typeface="Arial"/>
-              </a:rPr>
-              <a:t>Most attributes shift the lists; race is worst in movies (PRAG* SNSR 0.22)</a:t>
-            </a:r>
-          </a:p>
-          <a:p>
-            <a:pPr marL="201168" indent="-201168">
-              <a:spcAft>
-                <a:spcPts val="500"/>
-              </a:spcAft>
-              <a:buClr>
-                <a:srgbClr val="1E7568"/>
-              </a:buClr>
-              <a:buFont typeface="Arial"/>
-              <a:buChar char="•"/>
-            </a:pPr>
-            <a:r>
-              <a:rPr sz="1350" b="0">
-                <a:solidFill>
-                  <a:srgbClr val="18211F"/>
-                </a:solidFill>
-                <a:latin typeface="Arial"/>
-              </a:rPr>
-              <a:t>“African” and “Asian” users drift furthest from the neutral list</a:t>
-            </a:r>
-          </a:p>
-          <a:p>
-            <a:pPr marL="201168" indent="-201168">
-              <a:spcAft>
-                <a:spcPts val="500"/>
-              </a:spcAft>
-              <a:buClr>
-                <a:srgbClr val="1E7568"/>
-              </a:buClr>
-              <a:buFont typeface="Arial"/>
-              <a:buChar char="•"/>
-            </a:pPr>
-            <a:r>
-              <a:rPr sz="1350" b="0">
-                <a:solidFill>
-                  <a:srgbClr val="18211F"/>
-                </a:solidFill>
-                <a:latin typeface="Arial"/>
-              </a:rPr>
-              <a:t>Holds with typos near the attribute word and with Chinese-language prompts</a:t>
-            </a:r>
-          </a:p>
-        </p:txBody>
-      </p:sp>
-      <p:sp>
-        <p:nvSpPr>
-          <p:cNvPr id="14" name="Rectangle 13"/>
+      <p:sp>
+        <p:nvSpPr>
+          <p:cNvPr id="4" name="Rectangle 3"/>
           <p:cNvSpPr/>
           <p:nvPr/>
         </p:nvSpPr>
         <p:spPr>
           <a:xfrm>
-            <a:off x="8321040" y="1536192"/>
-            <a:ext cx="3319272" cy="4709160"/>
+            <a:off x="548640" y="1325880"/>
+            <a:ext cx="11091672" cy="10972"/>
           </a:xfrm>
           <a:prstGeom prst="rect">
             <a:avLst/>
           </a:prstGeom>
           <a:solidFill>
-            <a:srgbClr val="E3F0ED"/>
+            <a:srgbClr val="C6D0CC"/>
           </a:solidFill>
           <a:ln>
             <a:noFill/>
@@ -5858,14 +5376,14 @@
       </p:sp>
       <p:sp>
         <p:nvSpPr>
-          <p:cNvPr id="15" name="TextBox 14"/>
+          <p:cNvPr id="5" name="TextBox 4"/>
           <p:cNvSpPr txBox="1"/>
           <p:nvPr/>
         </p:nvSpPr>
         <p:spPr>
           <a:xfrm>
-            <a:off x="8549640" y="1737360"/>
-            <a:ext cx="2880360" cy="457200"/>
+            <a:off x="10881360" y="6446520"/>
+            <a:ext cx="758952" cy="228600"/>
           </a:xfrm>
           <a:prstGeom prst="rect">
             <a:avLst/>
@@ -5878,29 +5396,29 @@
           </a:bodyPr>
           <a:lstStyle/>
           <a:p>
-            <a:pPr algn="l"/>
-            <a:r>
-              <a:rPr sz="1050" b="1" i="0">
-                <a:solidFill>
-                  <a:srgbClr val="1E7568"/>
-                </a:solidFill>
-                <a:latin typeface="Arial"/>
-              </a:rPr>
-              <a:t>HOW THEY EVALUATE</a:t>
-            </a:r>
-          </a:p>
-        </p:txBody>
-      </p:sp>
-      <p:sp>
-        <p:nvSpPr>
-          <p:cNvPr id="16" name="TextBox 15"/>
+            <a:pPr algn="r"/>
+            <a:r>
+              <a:rPr sz="1000" b="0" i="0">
+                <a:solidFill>
+                  <a:srgbClr val="5B6964"/>
+                </a:solidFill>
+                <a:latin typeface="Arial"/>
+              </a:rPr>
+              <a:t>3</a:t>
+            </a:r>
+          </a:p>
+        </p:txBody>
+      </p:sp>
+      <p:sp>
+        <p:nvSpPr>
+          <p:cNvPr id="6" name="TextBox 5"/>
           <p:cNvSpPr txBox="1"/>
           <p:nvPr/>
         </p:nvSpPr>
         <p:spPr>
           <a:xfrm>
-            <a:off x="8549640" y="2103120"/>
-            <a:ext cx="2880360" cy="4023360"/>
+            <a:off x="548640" y="6446520"/>
+            <a:ext cx="7315200" cy="228600"/>
           </a:xfrm>
           <a:prstGeom prst="rect">
             <a:avLst/>
@@ -5908,6 +5426,538 @@
           <a:noFill/>
         </p:spPr>
         <p:txBody>
+          <a:bodyPr wrap="square" lIns="0" rIns="0" tIns="0" bIns="0" anchor="t">
+            <a:spAutoFit/>
+          </a:bodyPr>
+          <a:lstStyle/>
+          <a:p>
+            <a:pPr algn="l"/>
+            <a:r>
+              <a:rPr sz="1000" b="0" i="0">
+                <a:solidFill>
+                  <a:srgbClr val="5B6964"/>
+                </a:solidFill>
+                <a:latin typeface="Arial"/>
+              </a:rPr>
+              <a:t>Related work for FAIR-TRACE / SCAFF · 2026-09-11</a:t>
+            </a:r>
+          </a:p>
+        </p:txBody>
+      </p:sp>
+      <p:sp>
+        <p:nvSpPr>
+          <p:cNvPr id="7" name="TextBox 6"/>
+          <p:cNvSpPr txBox="1"/>
+          <p:nvPr/>
+        </p:nvSpPr>
+        <p:spPr>
+          <a:xfrm>
+            <a:off x="548640" y="1536192"/>
+            <a:ext cx="7406640" cy="457200"/>
+          </a:xfrm>
+          <a:prstGeom prst="rect">
+            <a:avLst/>
+          </a:prstGeom>
+          <a:noFill/>
+        </p:spPr>
+        <p:txBody>
+          <a:bodyPr wrap="square" lIns="0" rIns="0" tIns="0" bIns="0" anchor="t">
+            <a:spAutoFit/>
+          </a:bodyPr>
+          <a:lstStyle/>
+          <a:p>
+            <a:pPr algn="l"/>
+            <a:r>
+              <a:rPr sz="1500" b="1" i="0">
+                <a:solidFill>
+                  <a:srgbClr val="1E7568"/>
+                </a:solidFill>
+                <a:latin typeface="Arial"/>
+              </a:rPr>
+              <a:t>Question  </a:t>
+            </a:r>
+            <a:r>
+              <a:rPr sz="1500" b="0" i="0">
+                <a:solidFill>
+                  <a:srgbClr val="18211F"/>
+                </a:solidFill>
+                <a:latin typeface="Arial"/>
+              </a:rPr>
+              <a:t>Does ChatGPT change its recommendations when the user states a sensitive attribute?</a:t>
+            </a:r>
+          </a:p>
+        </p:txBody>
+      </p:sp>
+      <p:sp>
+        <p:nvSpPr>
+          <p:cNvPr id="8" name="TextBox 7"/>
+          <p:cNvSpPr txBox="1"/>
+          <p:nvPr/>
+        </p:nvSpPr>
+        <p:spPr>
+          <a:xfrm>
+            <a:off x="548640" y="2148840"/>
+            <a:ext cx="7406640" cy="228600"/>
+          </a:xfrm>
+          <a:prstGeom prst="rect">
+            <a:avLst/>
+          </a:prstGeom>
+          <a:noFill/>
+        </p:spPr>
+        <p:txBody>
+          <a:bodyPr wrap="square" lIns="0" rIns="0" tIns="0" bIns="0" anchor="t">
+            <a:spAutoFit/>
+          </a:bodyPr>
+          <a:lstStyle/>
+          <a:p>
+            <a:pPr algn="l"/>
+            <a:r>
+              <a:rPr sz="1050" b="1" i="0">
+                <a:solidFill>
+                  <a:srgbClr val="5B6964"/>
+                </a:solidFill>
+                <a:latin typeface="Arial"/>
+              </a:rPr>
+              <a:t>SETUP</a:t>
+            </a:r>
+          </a:p>
+        </p:txBody>
+      </p:sp>
+      <p:sp>
+        <p:nvSpPr>
+          <p:cNvPr id="9" name="TextBox 8"/>
+          <p:cNvSpPr txBox="1"/>
+          <p:nvPr/>
+        </p:nvSpPr>
+        <p:spPr>
+          <a:xfrm>
+            <a:off x="548640" y="2423160"/>
+            <a:ext cx="7406640" cy="1143000"/>
+          </a:xfrm>
+          <a:prstGeom prst="rect">
+            <a:avLst/>
+          </a:prstGeom>
+          <a:noFill/>
+        </p:spPr>
+        <p:txBody>
+          <a:bodyPr wrap="square" lIns="0" rIns="0" tIns="0" bIns="0">
+            <a:spAutoFit/>
+          </a:bodyPr>
+          <a:lstStyle/>
+          <a:p>
+            <a:pPr marL="201168" indent="-201168">
+              <a:spcAft>
+                <a:spcPts val="500"/>
+              </a:spcAft>
+            </a:pPr>
+            <a:r>
+              <a:rPr sz="1350">
+                <a:solidFill>
+                  <a:srgbClr val="1E7568"/>
+                </a:solidFill>
+                <a:latin typeface="Arial"/>
+              </a:rPr>
+              <a:t>•  </a:t>
+            </a:r>
+            <a:r>
+              <a:rPr sz="1350" b="0">
+                <a:solidFill>
+                  <a:srgbClr val="18211F"/>
+                </a:solidFill>
+                <a:latin typeface="Arial"/>
+              </a:rPr>
+              <a:t>Music (500 popular singers) and movies (500 top directors); request K = 20 titles</a:t>
+            </a:r>
+          </a:p>
+          <a:p>
+            <a:pPr marL="201168" indent="-201168">
+              <a:spcAft>
+                <a:spcPts val="500"/>
+              </a:spcAft>
+            </a:pPr>
+            <a:r>
+              <a:rPr sz="1350">
+                <a:solidFill>
+                  <a:srgbClr val="1E7568"/>
+                </a:solidFill>
+                <a:latin typeface="Arial"/>
+              </a:rPr>
+              <a:t>•  </a:t>
+            </a:r>
+            <a:r>
+              <a:rPr sz="1350" b="0">
+                <a:solidFill>
+                  <a:srgbClr val="18211F"/>
+                </a:solidFill>
+                <a:latin typeface="Arial"/>
+              </a:rPr>
+              <a:t>8 attributes: age, country, gender, continent, occupation, race, religion, physical traits</a:t>
+            </a:r>
+          </a:p>
+          <a:p>
+            <a:pPr marL="201168" indent="-201168">
+              <a:spcAft>
+                <a:spcPts val="500"/>
+              </a:spcAft>
+            </a:pPr>
+            <a:r>
+              <a:rPr sz="1350">
+                <a:solidFill>
+                  <a:srgbClr val="1E7568"/>
+                </a:solidFill>
+                <a:latin typeface="Arial"/>
+              </a:rPr>
+              <a:t>•  </a:t>
+            </a:r>
+            <a:r>
+              <a:rPr sz="1350" b="0">
+                <a:solidFill>
+                  <a:srgbClr val="18211F"/>
+                </a:solidFill>
+                <a:latin typeface="Arial"/>
+              </a:rPr>
+              <a:t>Neutral prompt “I am a fan of X” vs. “I am a/an [attribute] fan of X”; greedy decoding</a:t>
+            </a:r>
+          </a:p>
+        </p:txBody>
+      </p:sp>
+      <p:sp>
+        <p:nvSpPr>
+          <p:cNvPr id="10" name="TextBox 9"/>
+          <p:cNvSpPr txBox="1"/>
+          <p:nvPr/>
+        </p:nvSpPr>
+        <p:spPr>
+          <a:xfrm>
+            <a:off x="548640" y="3675887"/>
+            <a:ext cx="7406640" cy="228600"/>
+          </a:xfrm>
+          <a:prstGeom prst="rect">
+            <a:avLst/>
+          </a:prstGeom>
+          <a:noFill/>
+        </p:spPr>
+        <p:txBody>
+          <a:bodyPr wrap="square" lIns="0" rIns="0" tIns="0" bIns="0" anchor="t">
+            <a:spAutoFit/>
+          </a:bodyPr>
+          <a:lstStyle/>
+          <a:p>
+            <a:pPr algn="l"/>
+            <a:r>
+              <a:rPr sz="1050" b="1" i="0">
+                <a:solidFill>
+                  <a:srgbClr val="5B6964"/>
+                </a:solidFill>
+                <a:latin typeface="Arial"/>
+              </a:rPr>
+              <a:t>METRICS</a:t>
+            </a:r>
+          </a:p>
+        </p:txBody>
+      </p:sp>
+      <p:sp>
+        <p:nvSpPr>
+          <p:cNvPr id="11" name="TextBox 10"/>
+          <p:cNvSpPr txBox="1"/>
+          <p:nvPr/>
+        </p:nvSpPr>
+        <p:spPr>
+          <a:xfrm>
+            <a:off x="548640" y="3950207"/>
+            <a:ext cx="7406640" cy="731520"/>
+          </a:xfrm>
+          <a:prstGeom prst="rect">
+            <a:avLst/>
+          </a:prstGeom>
+          <a:noFill/>
+        </p:spPr>
+        <p:txBody>
+          <a:bodyPr wrap="square" lIns="0" rIns="0" tIns="0" bIns="0">
+            <a:spAutoFit/>
+          </a:bodyPr>
+          <a:lstStyle/>
+          <a:p>
+            <a:pPr marL="201168" indent="-201168">
+              <a:spcAft>
+                <a:spcPts val="500"/>
+              </a:spcAft>
+            </a:pPr>
+            <a:r>
+              <a:rPr sz="1350">
+                <a:solidFill>
+                  <a:srgbClr val="1E7568"/>
+                </a:solidFill>
+                <a:latin typeface="Arial"/>
+              </a:rPr>
+              <a:t>•  </a:t>
+            </a:r>
+            <a:r>
+              <a:rPr sz="1350" b="0">
+                <a:solidFill>
+                  <a:srgbClr val="18211F"/>
+                </a:solidFill>
+                <a:latin typeface="Arial"/>
+              </a:rPr>
+              <a:t>Similarity of each attribute's list to the neutral list: Jaccard, SERP*, PRAG*</a:t>
+            </a:r>
+          </a:p>
+          <a:p>
+            <a:pPr marL="201168" indent="-201168">
+              <a:spcAft>
+                <a:spcPts val="500"/>
+              </a:spcAft>
+            </a:pPr>
+            <a:r>
+              <a:rPr sz="1350">
+                <a:solidFill>
+                  <a:srgbClr val="1E7568"/>
+                </a:solidFill>
+                <a:latin typeface="Arial"/>
+              </a:rPr>
+              <a:t>•  </a:t>
+            </a:r>
+            <a:r>
+              <a:rPr sz="1350" b="0">
+                <a:solidFill>
+                  <a:srgbClr val="18211F"/>
+                </a:solidFill>
+                <a:latin typeface="Arial"/>
+              </a:rPr>
+              <a:t>Unfairness = spread across values: SNSR (max − min) and SNSV (std)</a:t>
+            </a:r>
+          </a:p>
+        </p:txBody>
+      </p:sp>
+      <p:sp>
+        <p:nvSpPr>
+          <p:cNvPr id="12" name="TextBox 11"/>
+          <p:cNvSpPr txBox="1"/>
+          <p:nvPr/>
+        </p:nvSpPr>
+        <p:spPr>
+          <a:xfrm>
+            <a:off x="548640" y="4791456"/>
+            <a:ext cx="7406640" cy="228600"/>
+          </a:xfrm>
+          <a:prstGeom prst="rect">
+            <a:avLst/>
+          </a:prstGeom>
+          <a:noFill/>
+        </p:spPr>
+        <p:txBody>
+          <a:bodyPr wrap="square" lIns="0" rIns="0" tIns="0" bIns="0" anchor="t">
+            <a:spAutoFit/>
+          </a:bodyPr>
+          <a:lstStyle/>
+          <a:p>
+            <a:pPr algn="l"/>
+            <a:r>
+              <a:rPr sz="1050" b="1" i="0">
+                <a:solidFill>
+                  <a:srgbClr val="5B6964"/>
+                </a:solidFill>
+                <a:latin typeface="Arial"/>
+              </a:rPr>
+              <a:t>FINDINGS</a:t>
+            </a:r>
+          </a:p>
+        </p:txBody>
+      </p:sp>
+      <p:sp>
+        <p:nvSpPr>
+          <p:cNvPr id="13" name="TextBox 12"/>
+          <p:cNvSpPr txBox="1"/>
+          <p:nvPr/>
+        </p:nvSpPr>
+        <p:spPr>
+          <a:xfrm>
+            <a:off x="548640" y="5065776"/>
+            <a:ext cx="7406640" cy="1143000"/>
+          </a:xfrm>
+          <a:prstGeom prst="rect">
+            <a:avLst/>
+          </a:prstGeom>
+          <a:noFill/>
+        </p:spPr>
+        <p:txBody>
+          <a:bodyPr wrap="square" lIns="0" rIns="0" tIns="0" bIns="0">
+            <a:spAutoFit/>
+          </a:bodyPr>
+          <a:lstStyle/>
+          <a:p>
+            <a:pPr marL="201168" indent="-201168">
+              <a:spcAft>
+                <a:spcPts val="500"/>
+              </a:spcAft>
+            </a:pPr>
+            <a:r>
+              <a:rPr sz="1350">
+                <a:solidFill>
+                  <a:srgbClr val="1E7568"/>
+                </a:solidFill>
+                <a:latin typeface="Arial"/>
+              </a:rPr>
+              <a:t>•  </a:t>
+            </a:r>
+            <a:r>
+              <a:rPr sz="1350" b="0">
+                <a:solidFill>
+                  <a:srgbClr val="18211F"/>
+                </a:solidFill>
+                <a:latin typeface="Arial"/>
+              </a:rPr>
+              <a:t>Most attributes shift the lists; race is worst in movies (PRAG* SNSR 0.22)</a:t>
+            </a:r>
+          </a:p>
+          <a:p>
+            <a:pPr marL="201168" indent="-201168">
+              <a:spcAft>
+                <a:spcPts val="500"/>
+              </a:spcAft>
+            </a:pPr>
+            <a:r>
+              <a:rPr sz="1350">
+                <a:solidFill>
+                  <a:srgbClr val="1E7568"/>
+                </a:solidFill>
+                <a:latin typeface="Arial"/>
+              </a:rPr>
+              <a:t>•  </a:t>
+            </a:r>
+            <a:r>
+              <a:rPr sz="1350" b="0">
+                <a:solidFill>
+                  <a:srgbClr val="18211F"/>
+                </a:solidFill>
+                <a:latin typeface="Arial"/>
+              </a:rPr>
+              <a:t>“African” and “Asian” users drift furthest from the neutral list</a:t>
+            </a:r>
+          </a:p>
+          <a:p>
+            <a:pPr marL="201168" indent="-201168">
+              <a:spcAft>
+                <a:spcPts val="500"/>
+              </a:spcAft>
+            </a:pPr>
+            <a:r>
+              <a:rPr sz="1350">
+                <a:solidFill>
+                  <a:srgbClr val="1E7568"/>
+                </a:solidFill>
+                <a:latin typeface="Arial"/>
+              </a:rPr>
+              <a:t>•  </a:t>
+            </a:r>
+            <a:r>
+              <a:rPr sz="1350" b="0">
+                <a:solidFill>
+                  <a:srgbClr val="18211F"/>
+                </a:solidFill>
+                <a:latin typeface="Arial"/>
+              </a:rPr>
+              <a:t>Holds with typos near the attribute word and with Chinese-language prompts</a:t>
+            </a:r>
+          </a:p>
+        </p:txBody>
+      </p:sp>
+      <p:sp>
+        <p:nvSpPr>
+          <p:cNvPr id="14" name="Rectangle 13"/>
+          <p:cNvSpPr/>
+          <p:nvPr/>
+        </p:nvSpPr>
+        <p:spPr>
+          <a:xfrm>
+            <a:off x="8321040" y="1536192"/>
+            <a:ext cx="3319272" cy="4709160"/>
+          </a:xfrm>
+          <a:prstGeom prst="rect">
+            <a:avLst/>
+          </a:prstGeom>
+          <a:solidFill>
+            <a:srgbClr val="E3F0ED"/>
+          </a:solidFill>
+          <a:ln>
+            <a:noFill/>
+          </a:ln>
+          <a:effectLst/>
+        </p:spPr>
+        <p:style>
+          <a:lnRef idx="1">
+            <a:schemeClr val="accent1"/>
+          </a:lnRef>
+          <a:fillRef idx="3">
+            <a:schemeClr val="accent1"/>
+          </a:fillRef>
+          <a:effectRef idx="2">
+            <a:schemeClr val="accent1"/>
+          </a:effectRef>
+          <a:fontRef idx="minor">
+            <a:schemeClr val="lt1"/>
+          </a:fontRef>
+        </p:style>
+        <p:txBody>
+          <a:bodyPr rtlCol="0" anchor="ctr"/>
+          <a:lstStyle/>
+          <a:p>
+            <a:pPr algn="ctr"/>
+          </a:p>
+        </p:txBody>
+      </p:sp>
+      <p:sp>
+        <p:nvSpPr>
+          <p:cNvPr id="15" name="TextBox 14"/>
+          <p:cNvSpPr txBox="1"/>
+          <p:nvPr/>
+        </p:nvSpPr>
+        <p:spPr>
+          <a:xfrm>
+            <a:off x="8549640" y="1737360"/>
+            <a:ext cx="2880360" cy="457200"/>
+          </a:xfrm>
+          <a:prstGeom prst="rect">
+            <a:avLst/>
+          </a:prstGeom>
+          <a:noFill/>
+        </p:spPr>
+        <p:txBody>
+          <a:bodyPr wrap="square" lIns="0" rIns="0" tIns="0" bIns="0" anchor="t">
+            <a:spAutoFit/>
+          </a:bodyPr>
+          <a:lstStyle/>
+          <a:p>
+            <a:pPr algn="l"/>
+            <a:r>
+              <a:rPr sz="1050" b="1" i="0">
+                <a:solidFill>
+                  <a:srgbClr val="1E7568"/>
+                </a:solidFill>
+                <a:latin typeface="Arial"/>
+              </a:rPr>
+              <a:t>HOW THEY EVALUATE</a:t>
+            </a:r>
+          </a:p>
+        </p:txBody>
+      </p:sp>
+      <p:sp>
+        <p:nvSpPr>
+          <p:cNvPr id="16" name="TextBox 15"/>
+          <p:cNvSpPr txBox="1"/>
+          <p:nvPr/>
+        </p:nvSpPr>
+        <p:spPr>
+          <a:xfrm>
+            <a:off x="8549640" y="2103120"/>
+            <a:ext cx="2880360" cy="4023360"/>
+          </a:xfrm>
+          <a:prstGeom prst="rect">
+            <a:avLst/>
+          </a:prstGeom>
+          <a:noFill/>
+        </p:spPr>
+        <p:txBody>
           <a:bodyPr wrap="square" lIns="0" rIns="0" tIns="0" bIns="0">
             <a:spAutoFit/>
           </a:bodyPr>
@@ -5917,12 +5967,16 @@
               <a:spcAft>
                 <a:spcPts val="800"/>
               </a:spcAft>
-              <a:buClr>
-                <a:srgbClr val="1E7568"/>
-              </a:buClr>
-              <a:buFont typeface="Arial"/>
-              <a:buChar char="•"/>
             </a:pPr>
+            <a:r>
+              <a:rPr sz="1300">
+                <a:solidFill>
+                  <a:srgbClr val="1E7568"/>
+                </a:solidFill>
+                <a:latin typeface="Arial"/>
+              </a:rPr>
+              <a:t>•  </a:t>
+            </a:r>
             <a:r>
               <a:rPr sz="1300" b="0">
                 <a:solidFill>
@@ -5938,12 +5992,16 @@
               <a:spcAft>
                 <a:spcPts val="800"/>
               </a:spcAft>
-              <a:buClr>
-                <a:srgbClr val="1E7568"/>
-              </a:buClr>
-              <a:buFont typeface="Arial"/>
-              <a:buChar char="•"/>
             </a:pPr>
+            <a:r>
+              <a:rPr sz="1300">
+                <a:solidFill>
+                  <a:srgbClr val="1E7568"/>
+                </a:solidFill>
+                <a:latin typeface="Arial"/>
+              </a:rPr>
+              <a:t>•  </a:t>
+            </a:r>
             <a:r>
               <a:rPr sz="1300" b="0">
                 <a:solidFill>
@@ -5959,12 +6017,16 @@
               <a:spcAft>
                 <a:spcPts val="800"/>
               </a:spcAft>
-              <a:buClr>
-                <a:srgbClr val="1E7568"/>
-              </a:buClr>
-              <a:buFont typeface="Arial"/>
-              <a:buChar char="•"/>
             </a:pPr>
+            <a:r>
+              <a:rPr sz="1300">
+                <a:solidFill>
+                  <a:srgbClr val="1E7568"/>
+                </a:solidFill>
+                <a:latin typeface="Arial"/>
+              </a:rPr>
+              <a:t>•  </a:t>
+            </a:r>
             <a:r>
               <a:rPr sz="1300" b="0">
                 <a:solidFill>
@@ -5980,12 +6042,16 @@
               <a:spcAft>
                 <a:spcPts val="800"/>
               </a:spcAft>
-              <a:buClr>
-                <a:srgbClr val="1E7568"/>
-              </a:buClr>
-              <a:buFont typeface="Arial"/>
-              <a:buChar char="•"/>
             </a:pPr>
+            <a:r>
+              <a:rPr sz="1300">
+                <a:solidFill>
+                  <a:srgbClr val="1E7568"/>
+                </a:solidFill>
+                <a:latin typeface="Arial"/>
+              </a:rPr>
+              <a:t>•  </a:t>
+            </a:r>
             <a:r>
               <a:rPr sz="1300" b="1">
                 <a:solidFill>
@@ -6103,513 +6169,22 @@
           </a:p>
         </p:txBody>
       </p:sp>
-      <p:cxnSp>
-        <p:nvCxnSpPr>
-          <p:cNvPr id="4" name="Connector 3"/>
-          <p:cNvCxnSpPr/>
-          <p:nvPr/>
-        </p:nvCxnSpPr>
-        <p:spPr>
-          <a:xfrm>
-            <a:off x="548640" y="1325880"/>
-            <a:ext cx="11091672" cy="0"/>
-          </a:xfrm>
-          <a:prstGeom prst="line">
-            <a:avLst/>
-          </a:prstGeom>
-          <a:ln w="9525">
-            <a:solidFill>
-              <a:srgbClr val="C6D0CC"/>
-            </a:solidFill>
-          </a:ln>
-        </p:spPr>
-        <p:style>
-          <a:lnRef idx="2">
-            <a:schemeClr val="accent1"/>
-          </a:lnRef>
-          <a:fillRef idx="0">
-            <a:schemeClr val="accent1"/>
-          </a:fillRef>
-          <a:effectRef idx="1">
-            <a:schemeClr val="accent1"/>
-          </a:effectRef>
-          <a:fontRef idx="minor">
-            <a:schemeClr val="tx1"/>
-          </a:fontRef>
-        </p:style>
-      </p:cxnSp>
-      <p:sp>
-        <p:nvSpPr>
-          <p:cNvPr id="5" name="TextBox 4"/>
-          <p:cNvSpPr txBox="1"/>
-          <p:nvPr/>
-        </p:nvSpPr>
-        <p:spPr>
-          <a:xfrm>
-            <a:off x="10881360" y="6446520"/>
-            <a:ext cx="758952" cy="228600"/>
-          </a:xfrm>
-          <a:prstGeom prst="rect">
-            <a:avLst/>
-          </a:prstGeom>
-          <a:noFill/>
-        </p:spPr>
-        <p:txBody>
-          <a:bodyPr wrap="square" lIns="0" rIns="0" tIns="0" bIns="0" anchor="t">
-            <a:spAutoFit/>
-          </a:bodyPr>
-          <a:lstStyle/>
-          <a:p>
-            <a:pPr algn="r"/>
-            <a:r>
-              <a:rPr sz="1000" b="0" i="0">
-                <a:solidFill>
-                  <a:srgbClr val="5B6964"/>
-                </a:solidFill>
-                <a:latin typeface="Arial"/>
-              </a:rPr>
-              <a:t>4</a:t>
-            </a:r>
-          </a:p>
-        </p:txBody>
-      </p:sp>
-      <p:sp>
-        <p:nvSpPr>
-          <p:cNvPr id="6" name="TextBox 5"/>
-          <p:cNvSpPr txBox="1"/>
-          <p:nvPr/>
-        </p:nvSpPr>
-        <p:spPr>
-          <a:xfrm>
-            <a:off x="548640" y="6446520"/>
-            <a:ext cx="7315200" cy="228600"/>
-          </a:xfrm>
-          <a:prstGeom prst="rect">
-            <a:avLst/>
-          </a:prstGeom>
-          <a:noFill/>
-        </p:spPr>
-        <p:txBody>
-          <a:bodyPr wrap="square" lIns="0" rIns="0" tIns="0" bIns="0" anchor="t">
-            <a:spAutoFit/>
-          </a:bodyPr>
-          <a:lstStyle/>
-          <a:p>
-            <a:pPr algn="l"/>
-            <a:r>
-              <a:rPr sz="1000" b="0" i="0">
-                <a:solidFill>
-                  <a:srgbClr val="5B6964"/>
-                </a:solidFill>
-                <a:latin typeface="Arial"/>
-              </a:rPr>
-              <a:t>Related work for FAIR-TRACE / SCAFF · 2026-09-11</a:t>
-            </a:r>
-          </a:p>
-        </p:txBody>
-      </p:sp>
-      <p:sp>
-        <p:nvSpPr>
-          <p:cNvPr id="7" name="TextBox 6"/>
-          <p:cNvSpPr txBox="1"/>
-          <p:nvPr/>
-        </p:nvSpPr>
-        <p:spPr>
-          <a:xfrm>
-            <a:off x="548640" y="1536192"/>
-            <a:ext cx="7406640" cy="457200"/>
-          </a:xfrm>
-          <a:prstGeom prst="rect">
-            <a:avLst/>
-          </a:prstGeom>
-          <a:noFill/>
-        </p:spPr>
-        <p:txBody>
-          <a:bodyPr wrap="square" lIns="0" rIns="0" tIns="0" bIns="0" anchor="t">
-            <a:spAutoFit/>
-          </a:bodyPr>
-          <a:lstStyle/>
-          <a:p>
-            <a:pPr algn="l"/>
-            <a:r>
-              <a:rPr sz="1500" b="1" i="0">
-                <a:solidFill>
-                  <a:srgbClr val="1E7568"/>
-                </a:solidFill>
-                <a:latin typeface="Arial"/>
-              </a:rPr>
-              <a:t>Question  </a:t>
-            </a:r>
-            <a:r>
-              <a:rPr sz="1500" b="0" i="0">
-                <a:solidFill>
-                  <a:srgbClr val="18211F"/>
-                </a:solidFill>
-                <a:latin typeface="Arial"/>
-              </a:rPr>
-              <a:t>Is a change in recommendations unfair, or just personalization?</a:t>
-            </a:r>
-          </a:p>
-        </p:txBody>
-      </p:sp>
-      <p:sp>
-        <p:nvSpPr>
-          <p:cNvPr id="8" name="TextBox 7"/>
-          <p:cNvSpPr txBox="1"/>
-          <p:nvPr/>
-        </p:nvSpPr>
-        <p:spPr>
-          <a:xfrm>
-            <a:off x="548640" y="2148840"/>
-            <a:ext cx="7406640" cy="228600"/>
-          </a:xfrm>
-          <a:prstGeom prst="rect">
-            <a:avLst/>
-          </a:prstGeom>
-          <a:noFill/>
-        </p:spPr>
-        <p:txBody>
-          <a:bodyPr wrap="square" lIns="0" rIns="0" tIns="0" bIns="0" anchor="t">
-            <a:spAutoFit/>
-          </a:bodyPr>
-          <a:lstStyle/>
-          <a:p>
-            <a:pPr algn="l"/>
-            <a:r>
-              <a:rPr sz="1050" b="1" i="0">
-                <a:solidFill>
-                  <a:srgbClr val="5B6964"/>
-                </a:solidFill>
-                <a:latin typeface="Arial"/>
-              </a:rPr>
-              <a:t>SETUP</a:t>
-            </a:r>
-          </a:p>
-        </p:txBody>
-      </p:sp>
-      <p:sp>
-        <p:nvSpPr>
-          <p:cNvPr id="9" name="TextBox 8"/>
-          <p:cNvSpPr txBox="1"/>
-          <p:nvPr/>
-        </p:nvSpPr>
-        <p:spPr>
-          <a:xfrm>
-            <a:off x="548640" y="2423160"/>
-            <a:ext cx="7406640" cy="1143000"/>
-          </a:xfrm>
-          <a:prstGeom prst="rect">
-            <a:avLst/>
-          </a:prstGeom>
-          <a:noFill/>
-        </p:spPr>
-        <p:txBody>
-          <a:bodyPr wrap="square" lIns="0" rIns="0" tIns="0" bIns="0">
-            <a:spAutoFit/>
-          </a:bodyPr>
-          <a:lstStyle/>
-          <a:p>
-            <a:pPr marL="201168" indent="-201168">
-              <a:spcAft>
-                <a:spcPts val="500"/>
-              </a:spcAft>
-              <a:buClr>
-                <a:srgbClr val="1E7568"/>
-              </a:buClr>
-              <a:buFont typeface="Arial"/>
-              <a:buChar char="•"/>
-            </a:pPr>
-            <a:r>
-              <a:rPr sz="1350" b="0">
-                <a:solidFill>
-                  <a:srgbClr val="18211F"/>
-                </a:solidFill>
-                <a:latin typeface="Arial"/>
-              </a:rPr>
-              <a:t>Real histories: MovieLens-1M and LastFM-1K, about 150 users each</a:t>
-            </a:r>
-          </a:p>
-          <a:p>
-            <a:pPr marL="201168" indent="-201168">
-              <a:spcAft>
-                <a:spcPts val="500"/>
-              </a:spcAft>
-              <a:buClr>
-                <a:srgbClr val="1E7568"/>
-              </a:buClr>
-              <a:buFont typeface="Arial"/>
-              <a:buChar char="•"/>
-            </a:pPr>
-            <a:r>
-              <a:rPr sz="1350" b="0">
-                <a:solidFill>
-                  <a:srgbClr val="18211F"/>
-                </a:solidFill>
-                <a:latin typeface="Arial"/>
-              </a:rPr>
-              <a:t>Profile = 10 items sampled three ways: random, top-rated, most recent</a:t>
-            </a:r>
-          </a:p>
-          <a:p>
-            <a:pPr marL="201168" indent="-201168">
-              <a:spcAft>
-                <a:spcPts val="500"/>
-              </a:spcAft>
-              <a:buClr>
-                <a:srgbClr val="1E7568"/>
-              </a:buClr>
-              <a:buFont typeface="Arial"/>
-              <a:buChar char="•"/>
-            </a:pPr>
-            <a:r>
-              <a:rPr sz="1350" b="0">
-                <a:solidFill>
-                  <a:srgbClr val="18211F"/>
-                </a:solidFill>
-                <a:latin typeface="Arial"/>
-              </a:rPr>
-              <a:t>Attribute added to the prompt, alone or intersectional (e.g., age × gender)</a:t>
-            </a:r>
-          </a:p>
-        </p:txBody>
-      </p:sp>
-      <p:sp>
-        <p:nvSpPr>
-          <p:cNvPr id="10" name="TextBox 9"/>
-          <p:cNvSpPr txBox="1"/>
-          <p:nvPr/>
-        </p:nvSpPr>
-        <p:spPr>
-          <a:xfrm>
-            <a:off x="548640" y="3675887"/>
-            <a:ext cx="7406640" cy="228600"/>
-          </a:xfrm>
-          <a:prstGeom prst="rect">
-            <a:avLst/>
-          </a:prstGeom>
-          <a:noFill/>
-        </p:spPr>
-        <p:txBody>
-          <a:bodyPr wrap="square" lIns="0" rIns="0" tIns="0" bIns="0" anchor="t">
-            <a:spAutoFit/>
-          </a:bodyPr>
-          <a:lstStyle/>
-          <a:p>
-            <a:pPr algn="l"/>
-            <a:r>
-              <a:rPr sz="1050" b="1" i="0">
-                <a:solidFill>
-                  <a:srgbClr val="5B6964"/>
-                </a:solidFill>
-                <a:latin typeface="Arial"/>
-              </a:rPr>
-              <a:t>METRICS</a:t>
-            </a:r>
-          </a:p>
-        </p:txBody>
-      </p:sp>
-      <p:sp>
-        <p:nvSpPr>
-          <p:cNvPr id="11" name="TextBox 10"/>
-          <p:cNvSpPr txBox="1"/>
-          <p:nvPr/>
-        </p:nvSpPr>
-        <p:spPr>
-          <a:xfrm>
-            <a:off x="548640" y="3950207"/>
-            <a:ext cx="7406640" cy="1143000"/>
-          </a:xfrm>
-          <a:prstGeom prst="rect">
-            <a:avLst/>
-          </a:prstGeom>
-          <a:noFill/>
-        </p:spPr>
-        <p:txBody>
-          <a:bodyPr wrap="square" lIns="0" rIns="0" tIns="0" bIns="0">
-            <a:spAutoFit/>
-          </a:bodyPr>
-          <a:lstStyle/>
-          <a:p>
-            <a:pPr marL="201168" indent="-201168">
-              <a:spcAft>
-                <a:spcPts val="500"/>
-              </a:spcAft>
-              <a:buClr>
-                <a:srgbClr val="1E7568"/>
-              </a:buClr>
-              <a:buFont typeface="Arial"/>
-              <a:buChar char="•"/>
-            </a:pPr>
-            <a:r>
-              <a:rPr sz="1350" b="0">
-                <a:solidFill>
-                  <a:srgbClr val="18211F"/>
-                </a:solidFill>
-                <a:latin typeface="Arial"/>
-              </a:rPr>
-              <a:t>Item similarity to the neutral list (Jaccard, PRAG), as in FaiRLLM</a:t>
-            </a:r>
-          </a:p>
-          <a:p>
-            <a:pPr marL="201168" indent="-201168">
-              <a:spcAft>
-                <a:spcPts val="500"/>
-              </a:spcAft>
-              <a:buClr>
-                <a:srgbClr val="1E7568"/>
-              </a:buClr>
-              <a:buFont typeface="Arial"/>
-              <a:buChar char="•"/>
-            </a:pPr>
-            <a:r>
-              <a:rPr sz="1350" b="0">
-                <a:solidFill>
-                  <a:srgbClr val="18211F"/>
-                </a:solidFill>
-                <a:latin typeface="Arial"/>
-              </a:rPr>
-              <a:t>True-preference alignment: recommendations scored against held-out user items</a:t>
-            </a:r>
-          </a:p>
-          <a:p>
-            <a:pPr marL="201168" indent="-201168">
-              <a:spcAft>
-                <a:spcPts val="500"/>
-              </a:spcAft>
-              <a:buClr>
-                <a:srgbClr val="1E7568"/>
-              </a:buClr>
-              <a:buFont typeface="Arial"/>
-              <a:buChar char="•"/>
-            </a:pPr>
-            <a:r>
-              <a:rPr sz="1350" b="0">
-                <a:solidFill>
-                  <a:srgbClr val="18211F"/>
-                </a:solidFill>
-                <a:latin typeface="Arial"/>
-              </a:rPr>
-              <a:t>Same summaries across groups: SNSR and SNSV</a:t>
-            </a:r>
-          </a:p>
-        </p:txBody>
-      </p:sp>
-      <p:sp>
-        <p:nvSpPr>
-          <p:cNvPr id="12" name="TextBox 11"/>
-          <p:cNvSpPr txBox="1"/>
-          <p:nvPr/>
-        </p:nvSpPr>
-        <p:spPr>
-          <a:xfrm>
-            <a:off x="548640" y="5202936"/>
-            <a:ext cx="7406640" cy="228600"/>
-          </a:xfrm>
-          <a:prstGeom prst="rect">
-            <a:avLst/>
-          </a:prstGeom>
-          <a:noFill/>
-        </p:spPr>
-        <p:txBody>
-          <a:bodyPr wrap="square" lIns="0" rIns="0" tIns="0" bIns="0" anchor="t">
-            <a:spAutoFit/>
-          </a:bodyPr>
-          <a:lstStyle/>
-          <a:p>
-            <a:pPr algn="l"/>
-            <a:r>
-              <a:rPr sz="1050" b="1" i="0">
-                <a:solidFill>
-                  <a:srgbClr val="5B6964"/>
-                </a:solidFill>
-                <a:latin typeface="Arial"/>
-              </a:rPr>
-              <a:t>FINDINGS</a:t>
-            </a:r>
-          </a:p>
-        </p:txBody>
-      </p:sp>
-      <p:sp>
-        <p:nvSpPr>
-          <p:cNvPr id="13" name="TextBox 12"/>
-          <p:cNvSpPr txBox="1"/>
-          <p:nvPr/>
-        </p:nvSpPr>
-        <p:spPr>
-          <a:xfrm>
-            <a:off x="548640" y="5477255"/>
-            <a:ext cx="7406640" cy="731520"/>
-          </a:xfrm>
-          <a:prstGeom prst="rect">
-            <a:avLst/>
-          </a:prstGeom>
-          <a:noFill/>
-        </p:spPr>
-        <p:txBody>
-          <a:bodyPr wrap="square" lIns="0" rIns="0" tIns="0" bIns="0">
-            <a:spAutoFit/>
-          </a:bodyPr>
-          <a:lstStyle/>
-          <a:p>
-            <a:pPr marL="201168" indent="-201168">
-              <a:spcAft>
-                <a:spcPts val="500"/>
-              </a:spcAft>
-              <a:buClr>
-                <a:srgbClr val="1E7568"/>
-              </a:buClr>
-              <a:buFont typeface="Arial"/>
-              <a:buChar char="•"/>
-            </a:pPr>
-            <a:r>
-              <a:rPr sz="1350" b="0">
-                <a:solidFill>
-                  <a:srgbClr val="18211F"/>
-                </a:solidFill>
-                <a:latin typeface="Arial"/>
-              </a:rPr>
-              <a:t>Similarity-based measures report more unfairness than true-preference alignment</a:t>
-            </a:r>
-          </a:p>
-          <a:p>
-            <a:pPr marL="201168" indent="-201168">
-              <a:spcAft>
-                <a:spcPts val="500"/>
-              </a:spcAft>
-              <a:buClr>
-                <a:srgbClr val="1E7568"/>
-              </a:buClr>
-              <a:buFont typeface="Arial"/>
-              <a:buChar char="•"/>
-            </a:pPr>
-            <a:r>
-              <a:rPr sz="1350" b="0">
-                <a:solidFill>
-                  <a:srgbClr val="18211F"/>
-                </a:solidFill>
-                <a:latin typeface="Arial"/>
-              </a:rPr>
-              <a:t>Intersectional groups show larger gaps; profile sampling changes the conclusion</a:t>
-            </a:r>
-          </a:p>
-        </p:txBody>
-      </p:sp>
-      <p:sp>
-        <p:nvSpPr>
-          <p:cNvPr id="14" name="Rectangle 13"/>
+      <p:sp>
+        <p:nvSpPr>
+          <p:cNvPr id="4" name="Rectangle 3"/>
           <p:cNvSpPr/>
           <p:nvPr/>
         </p:nvSpPr>
         <p:spPr>
           <a:xfrm>
-            <a:off x="8321040" y="1536192"/>
-            <a:ext cx="3319272" cy="4709160"/>
+            <a:off x="548640" y="1325880"/>
+            <a:ext cx="11091672" cy="10972"/>
           </a:xfrm>
           <a:prstGeom prst="rect">
             <a:avLst/>
           </a:prstGeom>
           <a:solidFill>
-            <a:srgbClr val="E3F0ED"/>
+            <a:srgbClr val="C6D0CC"/>
           </a:solidFill>
           <a:ln>
             <a:noFill/>
@@ -6640,14 +6215,14 @@
       </p:sp>
       <p:sp>
         <p:nvSpPr>
-          <p:cNvPr id="15" name="TextBox 14"/>
+          <p:cNvPr id="5" name="TextBox 4"/>
           <p:cNvSpPr txBox="1"/>
           <p:nvPr/>
         </p:nvSpPr>
         <p:spPr>
           <a:xfrm>
-            <a:off x="8549640" y="1737360"/>
-            <a:ext cx="2880360" cy="457200"/>
+            <a:off x="10881360" y="6446520"/>
+            <a:ext cx="758952" cy="228600"/>
           </a:xfrm>
           <a:prstGeom prst="rect">
             <a:avLst/>
@@ -6660,29 +6235,29 @@
           </a:bodyPr>
           <a:lstStyle/>
           <a:p>
-            <a:pPr algn="l"/>
-            <a:r>
-              <a:rPr sz="1050" b="1" i="0">
-                <a:solidFill>
-                  <a:srgbClr val="1E7568"/>
-                </a:solidFill>
-                <a:latin typeface="Arial"/>
-              </a:rPr>
-              <a:t>HOW THEY EVALUATE</a:t>
-            </a:r>
-          </a:p>
-        </p:txBody>
-      </p:sp>
-      <p:sp>
-        <p:nvSpPr>
-          <p:cNvPr id="16" name="TextBox 15"/>
+            <a:pPr algn="r"/>
+            <a:r>
+              <a:rPr sz="1000" b="0" i="0">
+                <a:solidFill>
+                  <a:srgbClr val="5B6964"/>
+                </a:solidFill>
+                <a:latin typeface="Arial"/>
+              </a:rPr>
+              <a:t>4</a:t>
+            </a:r>
+          </a:p>
+        </p:txBody>
+      </p:sp>
+      <p:sp>
+        <p:nvSpPr>
+          <p:cNvPr id="6" name="TextBox 5"/>
           <p:cNvSpPr txBox="1"/>
           <p:nvPr/>
         </p:nvSpPr>
         <p:spPr>
           <a:xfrm>
-            <a:off x="8549640" y="2103120"/>
-            <a:ext cx="2880360" cy="4023360"/>
+            <a:off x="548640" y="6446520"/>
+            <a:ext cx="7315200" cy="228600"/>
           </a:xfrm>
           <a:prstGeom prst="rect">
             <a:avLst/>
@@ -6690,6 +6265,538 @@
           <a:noFill/>
         </p:spPr>
         <p:txBody>
+          <a:bodyPr wrap="square" lIns="0" rIns="0" tIns="0" bIns="0" anchor="t">
+            <a:spAutoFit/>
+          </a:bodyPr>
+          <a:lstStyle/>
+          <a:p>
+            <a:pPr algn="l"/>
+            <a:r>
+              <a:rPr sz="1000" b="0" i="0">
+                <a:solidFill>
+                  <a:srgbClr val="5B6964"/>
+                </a:solidFill>
+                <a:latin typeface="Arial"/>
+              </a:rPr>
+              <a:t>Related work for FAIR-TRACE / SCAFF · 2026-09-11</a:t>
+            </a:r>
+          </a:p>
+        </p:txBody>
+      </p:sp>
+      <p:sp>
+        <p:nvSpPr>
+          <p:cNvPr id="7" name="TextBox 6"/>
+          <p:cNvSpPr txBox="1"/>
+          <p:nvPr/>
+        </p:nvSpPr>
+        <p:spPr>
+          <a:xfrm>
+            <a:off x="548640" y="1536192"/>
+            <a:ext cx="7406640" cy="457200"/>
+          </a:xfrm>
+          <a:prstGeom prst="rect">
+            <a:avLst/>
+          </a:prstGeom>
+          <a:noFill/>
+        </p:spPr>
+        <p:txBody>
+          <a:bodyPr wrap="square" lIns="0" rIns="0" tIns="0" bIns="0" anchor="t">
+            <a:spAutoFit/>
+          </a:bodyPr>
+          <a:lstStyle/>
+          <a:p>
+            <a:pPr algn="l"/>
+            <a:r>
+              <a:rPr sz="1500" b="1" i="0">
+                <a:solidFill>
+                  <a:srgbClr val="1E7568"/>
+                </a:solidFill>
+                <a:latin typeface="Arial"/>
+              </a:rPr>
+              <a:t>Question  </a:t>
+            </a:r>
+            <a:r>
+              <a:rPr sz="1500" b="0" i="0">
+                <a:solidFill>
+                  <a:srgbClr val="18211F"/>
+                </a:solidFill>
+                <a:latin typeface="Arial"/>
+              </a:rPr>
+              <a:t>Is a change in recommendations unfair, or just personalization?</a:t>
+            </a:r>
+          </a:p>
+        </p:txBody>
+      </p:sp>
+      <p:sp>
+        <p:nvSpPr>
+          <p:cNvPr id="8" name="TextBox 7"/>
+          <p:cNvSpPr txBox="1"/>
+          <p:nvPr/>
+        </p:nvSpPr>
+        <p:spPr>
+          <a:xfrm>
+            <a:off x="548640" y="2148840"/>
+            <a:ext cx="7406640" cy="228600"/>
+          </a:xfrm>
+          <a:prstGeom prst="rect">
+            <a:avLst/>
+          </a:prstGeom>
+          <a:noFill/>
+        </p:spPr>
+        <p:txBody>
+          <a:bodyPr wrap="square" lIns="0" rIns="0" tIns="0" bIns="0" anchor="t">
+            <a:spAutoFit/>
+          </a:bodyPr>
+          <a:lstStyle/>
+          <a:p>
+            <a:pPr algn="l"/>
+            <a:r>
+              <a:rPr sz="1050" b="1" i="0">
+                <a:solidFill>
+                  <a:srgbClr val="5B6964"/>
+                </a:solidFill>
+                <a:latin typeface="Arial"/>
+              </a:rPr>
+              <a:t>SETUP</a:t>
+            </a:r>
+          </a:p>
+        </p:txBody>
+      </p:sp>
+      <p:sp>
+        <p:nvSpPr>
+          <p:cNvPr id="9" name="TextBox 8"/>
+          <p:cNvSpPr txBox="1"/>
+          <p:nvPr/>
+        </p:nvSpPr>
+        <p:spPr>
+          <a:xfrm>
+            <a:off x="548640" y="2423160"/>
+            <a:ext cx="7406640" cy="1143000"/>
+          </a:xfrm>
+          <a:prstGeom prst="rect">
+            <a:avLst/>
+          </a:prstGeom>
+          <a:noFill/>
+        </p:spPr>
+        <p:txBody>
+          <a:bodyPr wrap="square" lIns="0" rIns="0" tIns="0" bIns="0">
+            <a:spAutoFit/>
+          </a:bodyPr>
+          <a:lstStyle/>
+          <a:p>
+            <a:pPr marL="201168" indent="-201168">
+              <a:spcAft>
+                <a:spcPts val="500"/>
+              </a:spcAft>
+            </a:pPr>
+            <a:r>
+              <a:rPr sz="1350">
+                <a:solidFill>
+                  <a:srgbClr val="1E7568"/>
+                </a:solidFill>
+                <a:latin typeface="Arial"/>
+              </a:rPr>
+              <a:t>•  </a:t>
+            </a:r>
+            <a:r>
+              <a:rPr sz="1350" b="0">
+                <a:solidFill>
+                  <a:srgbClr val="18211F"/>
+                </a:solidFill>
+                <a:latin typeface="Arial"/>
+              </a:rPr>
+              <a:t>Real histories: MovieLens-1M and LastFM-1K, about 150 users each</a:t>
+            </a:r>
+          </a:p>
+          <a:p>
+            <a:pPr marL="201168" indent="-201168">
+              <a:spcAft>
+                <a:spcPts val="500"/>
+              </a:spcAft>
+            </a:pPr>
+            <a:r>
+              <a:rPr sz="1350">
+                <a:solidFill>
+                  <a:srgbClr val="1E7568"/>
+                </a:solidFill>
+                <a:latin typeface="Arial"/>
+              </a:rPr>
+              <a:t>•  </a:t>
+            </a:r>
+            <a:r>
+              <a:rPr sz="1350" b="0">
+                <a:solidFill>
+                  <a:srgbClr val="18211F"/>
+                </a:solidFill>
+                <a:latin typeface="Arial"/>
+              </a:rPr>
+              <a:t>Profile = 10 items sampled three ways: random, top-rated, most recent</a:t>
+            </a:r>
+          </a:p>
+          <a:p>
+            <a:pPr marL="201168" indent="-201168">
+              <a:spcAft>
+                <a:spcPts val="500"/>
+              </a:spcAft>
+            </a:pPr>
+            <a:r>
+              <a:rPr sz="1350">
+                <a:solidFill>
+                  <a:srgbClr val="1E7568"/>
+                </a:solidFill>
+                <a:latin typeface="Arial"/>
+              </a:rPr>
+              <a:t>•  </a:t>
+            </a:r>
+            <a:r>
+              <a:rPr sz="1350" b="0">
+                <a:solidFill>
+                  <a:srgbClr val="18211F"/>
+                </a:solidFill>
+                <a:latin typeface="Arial"/>
+              </a:rPr>
+              <a:t>Attribute added to the prompt, alone or intersectional (e.g., age × gender)</a:t>
+            </a:r>
+          </a:p>
+        </p:txBody>
+      </p:sp>
+      <p:sp>
+        <p:nvSpPr>
+          <p:cNvPr id="10" name="TextBox 9"/>
+          <p:cNvSpPr txBox="1"/>
+          <p:nvPr/>
+        </p:nvSpPr>
+        <p:spPr>
+          <a:xfrm>
+            <a:off x="548640" y="3675887"/>
+            <a:ext cx="7406640" cy="228600"/>
+          </a:xfrm>
+          <a:prstGeom prst="rect">
+            <a:avLst/>
+          </a:prstGeom>
+          <a:noFill/>
+        </p:spPr>
+        <p:txBody>
+          <a:bodyPr wrap="square" lIns="0" rIns="0" tIns="0" bIns="0" anchor="t">
+            <a:spAutoFit/>
+          </a:bodyPr>
+          <a:lstStyle/>
+          <a:p>
+            <a:pPr algn="l"/>
+            <a:r>
+              <a:rPr sz="1050" b="1" i="0">
+                <a:solidFill>
+                  <a:srgbClr val="5B6964"/>
+                </a:solidFill>
+                <a:latin typeface="Arial"/>
+              </a:rPr>
+              <a:t>METRICS</a:t>
+            </a:r>
+          </a:p>
+        </p:txBody>
+      </p:sp>
+      <p:sp>
+        <p:nvSpPr>
+          <p:cNvPr id="11" name="TextBox 10"/>
+          <p:cNvSpPr txBox="1"/>
+          <p:nvPr/>
+        </p:nvSpPr>
+        <p:spPr>
+          <a:xfrm>
+            <a:off x="548640" y="3950207"/>
+            <a:ext cx="7406640" cy="1143000"/>
+          </a:xfrm>
+          <a:prstGeom prst="rect">
+            <a:avLst/>
+          </a:prstGeom>
+          <a:noFill/>
+        </p:spPr>
+        <p:txBody>
+          <a:bodyPr wrap="square" lIns="0" rIns="0" tIns="0" bIns="0">
+            <a:spAutoFit/>
+          </a:bodyPr>
+          <a:lstStyle/>
+          <a:p>
+            <a:pPr marL="201168" indent="-201168">
+              <a:spcAft>
+                <a:spcPts val="500"/>
+              </a:spcAft>
+            </a:pPr>
+            <a:r>
+              <a:rPr sz="1350">
+                <a:solidFill>
+                  <a:srgbClr val="1E7568"/>
+                </a:solidFill>
+                <a:latin typeface="Arial"/>
+              </a:rPr>
+              <a:t>•  </a:t>
+            </a:r>
+            <a:r>
+              <a:rPr sz="1350" b="0">
+                <a:solidFill>
+                  <a:srgbClr val="18211F"/>
+                </a:solidFill>
+                <a:latin typeface="Arial"/>
+              </a:rPr>
+              <a:t>Item similarity to the neutral list (Jaccard, PRAG), as in FaiRLLM</a:t>
+            </a:r>
+          </a:p>
+          <a:p>
+            <a:pPr marL="201168" indent="-201168">
+              <a:spcAft>
+                <a:spcPts val="500"/>
+              </a:spcAft>
+            </a:pPr>
+            <a:r>
+              <a:rPr sz="1350">
+                <a:solidFill>
+                  <a:srgbClr val="1E7568"/>
+                </a:solidFill>
+                <a:latin typeface="Arial"/>
+              </a:rPr>
+              <a:t>•  </a:t>
+            </a:r>
+            <a:r>
+              <a:rPr sz="1350" b="0">
+                <a:solidFill>
+                  <a:srgbClr val="18211F"/>
+                </a:solidFill>
+                <a:latin typeface="Arial"/>
+              </a:rPr>
+              <a:t>True-preference alignment: recommendations scored against held-out user items</a:t>
+            </a:r>
+          </a:p>
+          <a:p>
+            <a:pPr marL="201168" indent="-201168">
+              <a:spcAft>
+                <a:spcPts val="500"/>
+              </a:spcAft>
+            </a:pPr>
+            <a:r>
+              <a:rPr sz="1350">
+                <a:solidFill>
+                  <a:srgbClr val="1E7568"/>
+                </a:solidFill>
+                <a:latin typeface="Arial"/>
+              </a:rPr>
+              <a:t>•  </a:t>
+            </a:r>
+            <a:r>
+              <a:rPr sz="1350" b="0">
+                <a:solidFill>
+                  <a:srgbClr val="18211F"/>
+                </a:solidFill>
+                <a:latin typeface="Arial"/>
+              </a:rPr>
+              <a:t>Same summaries across groups: SNSR and SNSV</a:t>
+            </a:r>
+          </a:p>
+        </p:txBody>
+      </p:sp>
+      <p:sp>
+        <p:nvSpPr>
+          <p:cNvPr id="12" name="TextBox 11"/>
+          <p:cNvSpPr txBox="1"/>
+          <p:nvPr/>
+        </p:nvSpPr>
+        <p:spPr>
+          <a:xfrm>
+            <a:off x="548640" y="5202936"/>
+            <a:ext cx="7406640" cy="228600"/>
+          </a:xfrm>
+          <a:prstGeom prst="rect">
+            <a:avLst/>
+          </a:prstGeom>
+          <a:noFill/>
+        </p:spPr>
+        <p:txBody>
+          <a:bodyPr wrap="square" lIns="0" rIns="0" tIns="0" bIns="0" anchor="t">
+            <a:spAutoFit/>
+          </a:bodyPr>
+          <a:lstStyle/>
+          <a:p>
+            <a:pPr algn="l"/>
+            <a:r>
+              <a:rPr sz="1050" b="1" i="0">
+                <a:solidFill>
+                  <a:srgbClr val="5B6964"/>
+                </a:solidFill>
+                <a:latin typeface="Arial"/>
+              </a:rPr>
+              <a:t>FINDINGS</a:t>
+            </a:r>
+          </a:p>
+        </p:txBody>
+      </p:sp>
+      <p:sp>
+        <p:nvSpPr>
+          <p:cNvPr id="13" name="TextBox 12"/>
+          <p:cNvSpPr txBox="1"/>
+          <p:nvPr/>
+        </p:nvSpPr>
+        <p:spPr>
+          <a:xfrm>
+            <a:off x="548640" y="5477255"/>
+            <a:ext cx="7406640" cy="731520"/>
+          </a:xfrm>
+          <a:prstGeom prst="rect">
+            <a:avLst/>
+          </a:prstGeom>
+          <a:noFill/>
+        </p:spPr>
+        <p:txBody>
+          <a:bodyPr wrap="square" lIns="0" rIns="0" tIns="0" bIns="0">
+            <a:spAutoFit/>
+          </a:bodyPr>
+          <a:lstStyle/>
+          <a:p>
+            <a:pPr marL="201168" indent="-201168">
+              <a:spcAft>
+                <a:spcPts val="500"/>
+              </a:spcAft>
+            </a:pPr>
+            <a:r>
+              <a:rPr sz="1350">
+                <a:solidFill>
+                  <a:srgbClr val="1E7568"/>
+                </a:solidFill>
+                <a:latin typeface="Arial"/>
+              </a:rPr>
+              <a:t>•  </a:t>
+            </a:r>
+            <a:r>
+              <a:rPr sz="1350" b="0">
+                <a:solidFill>
+                  <a:srgbClr val="18211F"/>
+                </a:solidFill>
+                <a:latin typeface="Arial"/>
+              </a:rPr>
+              <a:t>Similarity-based measures report more unfairness than true-preference alignment</a:t>
+            </a:r>
+          </a:p>
+          <a:p>
+            <a:pPr marL="201168" indent="-201168">
+              <a:spcAft>
+                <a:spcPts val="500"/>
+              </a:spcAft>
+            </a:pPr>
+            <a:r>
+              <a:rPr sz="1350">
+                <a:solidFill>
+                  <a:srgbClr val="1E7568"/>
+                </a:solidFill>
+                <a:latin typeface="Arial"/>
+              </a:rPr>
+              <a:t>•  </a:t>
+            </a:r>
+            <a:r>
+              <a:rPr sz="1350" b="0">
+                <a:solidFill>
+                  <a:srgbClr val="18211F"/>
+                </a:solidFill>
+                <a:latin typeface="Arial"/>
+              </a:rPr>
+              <a:t>Intersectional groups show larger gaps; profile sampling changes the conclusion</a:t>
+            </a:r>
+          </a:p>
+        </p:txBody>
+      </p:sp>
+      <p:sp>
+        <p:nvSpPr>
+          <p:cNvPr id="14" name="Rectangle 13"/>
+          <p:cNvSpPr/>
+          <p:nvPr/>
+        </p:nvSpPr>
+        <p:spPr>
+          <a:xfrm>
+            <a:off x="8321040" y="1536192"/>
+            <a:ext cx="3319272" cy="4709160"/>
+          </a:xfrm>
+          <a:prstGeom prst="rect">
+            <a:avLst/>
+          </a:prstGeom>
+          <a:solidFill>
+            <a:srgbClr val="E3F0ED"/>
+          </a:solidFill>
+          <a:ln>
+            <a:noFill/>
+          </a:ln>
+          <a:effectLst/>
+        </p:spPr>
+        <p:style>
+          <a:lnRef idx="1">
+            <a:schemeClr val="accent1"/>
+          </a:lnRef>
+          <a:fillRef idx="3">
+            <a:schemeClr val="accent1"/>
+          </a:fillRef>
+          <a:effectRef idx="2">
+            <a:schemeClr val="accent1"/>
+          </a:effectRef>
+          <a:fontRef idx="minor">
+            <a:schemeClr val="lt1"/>
+          </a:fontRef>
+        </p:style>
+        <p:txBody>
+          <a:bodyPr rtlCol="0" anchor="ctr"/>
+          <a:lstStyle/>
+          <a:p>
+            <a:pPr algn="ctr"/>
+          </a:p>
+        </p:txBody>
+      </p:sp>
+      <p:sp>
+        <p:nvSpPr>
+          <p:cNvPr id="15" name="TextBox 14"/>
+          <p:cNvSpPr txBox="1"/>
+          <p:nvPr/>
+        </p:nvSpPr>
+        <p:spPr>
+          <a:xfrm>
+            <a:off x="8549640" y="1737360"/>
+            <a:ext cx="2880360" cy="457200"/>
+          </a:xfrm>
+          <a:prstGeom prst="rect">
+            <a:avLst/>
+          </a:prstGeom>
+          <a:noFill/>
+        </p:spPr>
+        <p:txBody>
+          <a:bodyPr wrap="square" lIns="0" rIns="0" tIns="0" bIns="0" anchor="t">
+            <a:spAutoFit/>
+          </a:bodyPr>
+          <a:lstStyle/>
+          <a:p>
+            <a:pPr algn="l"/>
+            <a:r>
+              <a:rPr sz="1050" b="1" i="0">
+                <a:solidFill>
+                  <a:srgbClr val="1E7568"/>
+                </a:solidFill>
+                <a:latin typeface="Arial"/>
+              </a:rPr>
+              <a:t>HOW THEY EVALUATE</a:t>
+            </a:r>
+          </a:p>
+        </p:txBody>
+      </p:sp>
+      <p:sp>
+        <p:nvSpPr>
+          <p:cNvPr id="16" name="TextBox 15"/>
+          <p:cNvSpPr txBox="1"/>
+          <p:nvPr/>
+        </p:nvSpPr>
+        <p:spPr>
+          <a:xfrm>
+            <a:off x="8549640" y="2103120"/>
+            <a:ext cx="2880360" cy="4023360"/>
+          </a:xfrm>
+          <a:prstGeom prst="rect">
+            <a:avLst/>
+          </a:prstGeom>
+          <a:noFill/>
+        </p:spPr>
+        <p:txBody>
           <a:bodyPr wrap="square" lIns="0" rIns="0" tIns="0" bIns="0">
             <a:spAutoFit/>
           </a:bodyPr>
@@ -6699,12 +6806,16 @@
               <a:spcAft>
                 <a:spcPts val="800"/>
               </a:spcAft>
-              <a:buClr>
-                <a:srgbClr val="1E7568"/>
-              </a:buClr>
-              <a:buFont typeface="Arial"/>
-              <a:buChar char="•"/>
             </a:pPr>
+            <a:r>
+              <a:rPr sz="1300">
+                <a:solidFill>
+                  <a:srgbClr val="1E7568"/>
+                </a:solidFill>
+                <a:latin typeface="Arial"/>
+              </a:rPr>
+              <a:t>•  </a:t>
+            </a:r>
             <a:r>
               <a:rPr sz="1300" b="0">
                 <a:solidFill>
@@ -6720,12 +6831,16 @@
               <a:spcAft>
                 <a:spcPts val="800"/>
               </a:spcAft>
-              <a:buClr>
-                <a:srgbClr val="1E7568"/>
-              </a:buClr>
-              <a:buFont typeface="Arial"/>
-              <a:buChar char="•"/>
             </a:pPr>
+            <a:r>
+              <a:rPr sz="1300">
+                <a:solidFill>
+                  <a:srgbClr val="1E7568"/>
+                </a:solidFill>
+                <a:latin typeface="Arial"/>
+              </a:rPr>
+              <a:t>•  </a:t>
+            </a:r>
             <a:r>
               <a:rPr sz="1300" b="0">
                 <a:solidFill>
@@ -6741,12 +6856,16 @@
               <a:spcAft>
                 <a:spcPts val="800"/>
               </a:spcAft>
-              <a:buClr>
-                <a:srgbClr val="1E7568"/>
-              </a:buClr>
-              <a:buFont typeface="Arial"/>
-              <a:buChar char="•"/>
             </a:pPr>
+            <a:r>
+              <a:rPr sz="1300">
+                <a:solidFill>
+                  <a:srgbClr val="1E7568"/>
+                </a:solidFill>
+                <a:latin typeface="Arial"/>
+              </a:rPr>
+              <a:t>•  </a:t>
+            </a:r>
             <a:r>
               <a:rPr sz="1300" b="0">
                 <a:solidFill>
@@ -6762,12 +6881,16 @@
               <a:spcAft>
                 <a:spcPts val="800"/>
               </a:spcAft>
-              <a:buClr>
-                <a:srgbClr val="1E7568"/>
-              </a:buClr>
-              <a:buFont typeface="Arial"/>
-              <a:buChar char="•"/>
             </a:pPr>
+            <a:r>
+              <a:rPr sz="1300">
+                <a:solidFill>
+                  <a:srgbClr val="1E7568"/>
+                </a:solidFill>
+                <a:latin typeface="Arial"/>
+              </a:rPr>
+              <a:t>•  </a:t>
+            </a:r>
             <a:r>
               <a:rPr sz="1300" b="1">
                 <a:solidFill>
@@ -6885,492 +7008,22 @@
           </a:p>
         </p:txBody>
       </p:sp>
-      <p:cxnSp>
-        <p:nvCxnSpPr>
-          <p:cNvPr id="4" name="Connector 3"/>
-          <p:cNvCxnSpPr/>
-          <p:nvPr/>
-        </p:nvCxnSpPr>
-        <p:spPr>
-          <a:xfrm>
-            <a:off x="548640" y="1325880"/>
-            <a:ext cx="11091672" cy="0"/>
-          </a:xfrm>
-          <a:prstGeom prst="line">
-            <a:avLst/>
-          </a:prstGeom>
-          <a:ln w="9525">
-            <a:solidFill>
-              <a:srgbClr val="C6D0CC"/>
-            </a:solidFill>
-          </a:ln>
-        </p:spPr>
-        <p:style>
-          <a:lnRef idx="2">
-            <a:schemeClr val="accent1"/>
-          </a:lnRef>
-          <a:fillRef idx="0">
-            <a:schemeClr val="accent1"/>
-          </a:fillRef>
-          <a:effectRef idx="1">
-            <a:schemeClr val="accent1"/>
-          </a:effectRef>
-          <a:fontRef idx="minor">
-            <a:schemeClr val="tx1"/>
-          </a:fontRef>
-        </p:style>
-      </p:cxnSp>
-      <p:sp>
-        <p:nvSpPr>
-          <p:cNvPr id="5" name="TextBox 4"/>
-          <p:cNvSpPr txBox="1"/>
-          <p:nvPr/>
-        </p:nvSpPr>
-        <p:spPr>
-          <a:xfrm>
-            <a:off x="10881360" y="6446520"/>
-            <a:ext cx="758952" cy="228600"/>
-          </a:xfrm>
-          <a:prstGeom prst="rect">
-            <a:avLst/>
-          </a:prstGeom>
-          <a:noFill/>
-        </p:spPr>
-        <p:txBody>
-          <a:bodyPr wrap="square" lIns="0" rIns="0" tIns="0" bIns="0" anchor="t">
-            <a:spAutoFit/>
-          </a:bodyPr>
-          <a:lstStyle/>
-          <a:p>
-            <a:pPr algn="r"/>
-            <a:r>
-              <a:rPr sz="1000" b="0" i="0">
-                <a:solidFill>
-                  <a:srgbClr val="5B6964"/>
-                </a:solidFill>
-                <a:latin typeface="Arial"/>
-              </a:rPr>
-              <a:t>5</a:t>
-            </a:r>
-          </a:p>
-        </p:txBody>
-      </p:sp>
-      <p:sp>
-        <p:nvSpPr>
-          <p:cNvPr id="6" name="TextBox 5"/>
-          <p:cNvSpPr txBox="1"/>
-          <p:nvPr/>
-        </p:nvSpPr>
-        <p:spPr>
-          <a:xfrm>
-            <a:off x="548640" y="6446520"/>
-            <a:ext cx="7315200" cy="228600"/>
-          </a:xfrm>
-          <a:prstGeom prst="rect">
-            <a:avLst/>
-          </a:prstGeom>
-          <a:noFill/>
-        </p:spPr>
-        <p:txBody>
-          <a:bodyPr wrap="square" lIns="0" rIns="0" tIns="0" bIns="0" anchor="t">
-            <a:spAutoFit/>
-          </a:bodyPr>
-          <a:lstStyle/>
-          <a:p>
-            <a:pPr algn="l"/>
-            <a:r>
-              <a:rPr sz="1000" b="0" i="0">
-                <a:solidFill>
-                  <a:srgbClr val="5B6964"/>
-                </a:solidFill>
-                <a:latin typeface="Arial"/>
-              </a:rPr>
-              <a:t>Related work for FAIR-TRACE / SCAFF · 2026-09-11</a:t>
-            </a:r>
-          </a:p>
-        </p:txBody>
-      </p:sp>
-      <p:sp>
-        <p:nvSpPr>
-          <p:cNvPr id="7" name="TextBox 6"/>
-          <p:cNvSpPr txBox="1"/>
-          <p:nvPr/>
-        </p:nvSpPr>
-        <p:spPr>
-          <a:xfrm>
-            <a:off x="548640" y="1536192"/>
-            <a:ext cx="7406640" cy="457200"/>
-          </a:xfrm>
-          <a:prstGeom prst="rect">
-            <a:avLst/>
-          </a:prstGeom>
-          <a:noFill/>
-        </p:spPr>
-        <p:txBody>
-          <a:bodyPr wrap="square" lIns="0" rIns="0" tIns="0" bIns="0" anchor="t">
-            <a:spAutoFit/>
-          </a:bodyPr>
-          <a:lstStyle/>
-          <a:p>
-            <a:pPr algn="l"/>
-            <a:r>
-              <a:rPr sz="1500" b="1" i="0">
-                <a:solidFill>
-                  <a:srgbClr val="1E7568"/>
-                </a:solidFill>
-                <a:latin typeface="Arial"/>
-              </a:rPr>
-              <a:t>Question  </a:t>
-            </a:r>
-            <a:r>
-              <a:rPr sz="1500" b="0" i="0">
-                <a:solidFill>
-                  <a:srgbClr val="18211F"/>
-                </a:solidFill>
-                <a:latin typeface="Arial"/>
-              </a:rPr>
-              <a:t>Can balanced final outcomes hide unfair treatment inside a multi-agent process?</a:t>
-            </a:r>
-          </a:p>
-        </p:txBody>
-      </p:sp>
-      <p:sp>
-        <p:nvSpPr>
-          <p:cNvPr id="8" name="TextBox 7"/>
-          <p:cNvSpPr txBox="1"/>
-          <p:nvPr/>
-        </p:nvSpPr>
-        <p:spPr>
-          <a:xfrm>
-            <a:off x="548640" y="2148840"/>
-            <a:ext cx="7406640" cy="228600"/>
-          </a:xfrm>
-          <a:prstGeom prst="rect">
-            <a:avLst/>
-          </a:prstGeom>
-          <a:noFill/>
-        </p:spPr>
-        <p:txBody>
-          <a:bodyPr wrap="square" lIns="0" rIns="0" tIns="0" bIns="0" anchor="t">
-            <a:spAutoFit/>
-          </a:bodyPr>
-          <a:lstStyle/>
-          <a:p>
-            <a:pPr algn="l"/>
-            <a:r>
-              <a:rPr sz="1050" b="1" i="0">
-                <a:solidFill>
-                  <a:srgbClr val="5B6964"/>
-                </a:solidFill>
-                <a:latin typeface="Arial"/>
-              </a:rPr>
-              <a:t>SETUP</a:t>
-            </a:r>
-          </a:p>
-        </p:txBody>
-      </p:sp>
-      <p:sp>
-        <p:nvSpPr>
-          <p:cNvPr id="9" name="TextBox 8"/>
-          <p:cNvSpPr txBox="1"/>
-          <p:nvPr/>
-        </p:nvSpPr>
-        <p:spPr>
-          <a:xfrm>
-            <a:off x="548640" y="2423160"/>
-            <a:ext cx="7406640" cy="731520"/>
-          </a:xfrm>
-          <a:prstGeom prst="rect">
-            <a:avLst/>
-          </a:prstGeom>
-          <a:noFill/>
-        </p:spPr>
-        <p:txBody>
-          <a:bodyPr wrap="square" lIns="0" rIns="0" tIns="0" bIns="0">
-            <a:spAutoFit/>
-          </a:bodyPr>
-          <a:lstStyle/>
-          <a:p>
-            <a:pPr marL="201168" indent="-201168">
-              <a:spcAft>
-                <a:spcPts val="500"/>
-              </a:spcAft>
-              <a:buClr>
-                <a:srgbClr val="1E7568"/>
-              </a:buClr>
-              <a:buFont typeface="Arial"/>
-              <a:buChar char="•"/>
-            </a:pPr>
-            <a:r>
-              <a:rPr sz="1350" b="0">
-                <a:solidFill>
-                  <a:srgbClr val="18211F"/>
-                </a:solidFill>
-                <a:latin typeface="Arial"/>
-              </a:rPr>
-              <a:t>Committee: 3 screeners → 3 executives; debate, votes, private assessments logged</a:t>
-            </a:r>
-          </a:p>
-          <a:p>
-            <a:pPr marL="201168" indent="-201168">
-              <a:spcAft>
-                <a:spcPts val="500"/>
-              </a:spcAft>
-              <a:buClr>
-                <a:srgbClr val="1E7568"/>
-              </a:buClr>
-              <a:buFont typeface="Arial"/>
-              <a:buChar char="•"/>
-            </a:pPr>
-            <a:r>
-              <a:rPr sz="1350" b="0">
-                <a:solidFill>
-                  <a:srgbClr val="18211F"/>
-                </a:solidFill>
-                <a:latin typeface="Arial"/>
-              </a:rPr>
-              <a:t>Resume variants from real CVs change one cue, merit fixed; 311K trajectories, 3 LLMs</a:t>
-            </a:r>
-          </a:p>
-        </p:txBody>
-      </p:sp>
-      <p:sp>
-        <p:nvSpPr>
-          <p:cNvPr id="10" name="TextBox 9"/>
-          <p:cNvSpPr txBox="1"/>
-          <p:nvPr/>
-        </p:nvSpPr>
-        <p:spPr>
-          <a:xfrm>
-            <a:off x="548640" y="3264408"/>
-            <a:ext cx="7406640" cy="228600"/>
-          </a:xfrm>
-          <a:prstGeom prst="rect">
-            <a:avLst/>
-          </a:prstGeom>
-          <a:noFill/>
-        </p:spPr>
-        <p:txBody>
-          <a:bodyPr wrap="square" lIns="0" rIns="0" tIns="0" bIns="0" anchor="t">
-            <a:spAutoFit/>
-          </a:bodyPr>
-          <a:lstStyle/>
-          <a:p>
-            <a:pPr algn="l"/>
-            <a:r>
-              <a:rPr sz="1050" b="1" i="0">
-                <a:solidFill>
-                  <a:srgbClr val="5B6964"/>
-                </a:solidFill>
-                <a:latin typeface="Arial"/>
-              </a:rPr>
-              <a:t>METRICS · SIX LENSES</a:t>
-            </a:r>
-          </a:p>
-        </p:txBody>
-      </p:sp>
-      <p:sp>
-        <p:nvSpPr>
-          <p:cNvPr id="11" name="TextBox 10"/>
-          <p:cNvSpPr txBox="1"/>
-          <p:nvPr/>
-        </p:nvSpPr>
-        <p:spPr>
-          <a:xfrm>
-            <a:off x="548640" y="3538728"/>
-            <a:ext cx="7406640" cy="731520"/>
-          </a:xfrm>
-          <a:prstGeom prst="rect">
-            <a:avLst/>
-          </a:prstGeom>
-          <a:noFill/>
-        </p:spPr>
-        <p:txBody>
-          <a:bodyPr wrap="square" lIns="0" rIns="0" tIns="0" bIns="0">
-            <a:spAutoFit/>
-          </a:bodyPr>
-          <a:lstStyle/>
-          <a:p>
-            <a:pPr marL="201168" indent="-201168">
-              <a:spcAft>
-                <a:spcPts val="500"/>
-              </a:spcAft>
-              <a:buClr>
-                <a:srgbClr val="1E7568"/>
-              </a:buClr>
-              <a:buFont typeface="Arial"/>
-              <a:buChar char="•"/>
-            </a:pPr>
-            <a:r>
-              <a:rPr sz="1350" b="0">
-                <a:solidFill>
-                  <a:srgbClr val="18211F"/>
-                </a:solidFill>
-                <a:latin typeface="Arial"/>
-              </a:rPr>
-              <a:t>Outcome · counterfactual (flip rate, score ATE) · process (investigation requests, bias language)</a:t>
-            </a:r>
-          </a:p>
-          <a:p>
-            <a:pPr marL="201168" indent="-201168">
-              <a:spcAft>
-                <a:spcPts val="500"/>
-              </a:spcAft>
-              <a:buClr>
-                <a:srgbClr val="1E7568"/>
-              </a:buClr>
-              <a:buFont typeface="Arial"/>
-              <a:buChar char="•"/>
-            </a:pPr>
-            <a:r>
-              <a:rPr sz="1350" b="0">
-                <a:solidFill>
-                  <a:srgbClr val="18211F"/>
-                </a:solidFill>
-                <a:latin typeface="Arial"/>
-              </a:rPr>
-              <a:t>Pathway (Stage-1 pass gap vs. Stage-2 conversion gap) · debate dynamics · design effects</a:t>
-            </a:r>
-          </a:p>
-        </p:txBody>
-      </p:sp>
-      <p:sp>
-        <p:nvSpPr>
-          <p:cNvPr id="12" name="TextBox 11"/>
-          <p:cNvSpPr txBox="1"/>
-          <p:nvPr/>
-        </p:nvSpPr>
-        <p:spPr>
-          <a:xfrm>
-            <a:off x="548640" y="4379976"/>
-            <a:ext cx="7406640" cy="228600"/>
-          </a:xfrm>
-          <a:prstGeom prst="rect">
-            <a:avLst/>
-          </a:prstGeom>
-          <a:noFill/>
-        </p:spPr>
-        <p:txBody>
-          <a:bodyPr wrap="square" lIns="0" rIns="0" tIns="0" bIns="0" anchor="t">
-            <a:spAutoFit/>
-          </a:bodyPr>
-          <a:lstStyle/>
-          <a:p>
-            <a:pPr algn="l"/>
-            <a:r>
-              <a:rPr sz="1050" b="1" i="0">
-                <a:solidFill>
-                  <a:srgbClr val="5B6964"/>
-                </a:solidFill>
-                <a:latin typeface="Arial"/>
-              </a:rPr>
-              <a:t>FINDINGS</a:t>
-            </a:r>
-          </a:p>
-        </p:txBody>
-      </p:sp>
-      <p:sp>
-        <p:nvSpPr>
-          <p:cNvPr id="13" name="TextBox 12"/>
-          <p:cNvSpPr txBox="1"/>
-          <p:nvPr/>
-        </p:nvSpPr>
-        <p:spPr>
-          <a:xfrm>
-            <a:off x="548640" y="4654296"/>
-            <a:ext cx="7406640" cy="1188720"/>
-          </a:xfrm>
-          <a:prstGeom prst="rect">
-            <a:avLst/>
-          </a:prstGeom>
-          <a:noFill/>
-        </p:spPr>
-        <p:txBody>
-          <a:bodyPr wrap="square" lIns="0" rIns="0" tIns="0" bIns="0">
-            <a:spAutoFit/>
-          </a:bodyPr>
-          <a:lstStyle/>
-          <a:p>
-            <a:pPr marL="201168" indent="-201168">
-              <a:spcAft>
-                <a:spcPts val="500"/>
-              </a:spcAft>
-              <a:buClr>
-                <a:srgbClr val="1E7568"/>
-              </a:buClr>
-              <a:buFont typeface="Arial"/>
-              <a:buChar char="•"/>
-            </a:pPr>
-            <a:r>
-              <a:rPr sz="1350" b="0">
-                <a:solidFill>
-                  <a:srgbClr val="18211F"/>
-                </a:solidFill>
-                <a:latin typeface="Arial"/>
-              </a:rPr>
-              <a:t>Process-level signals 2.7–4.7× larger than outcome-level signals</a:t>
-            </a:r>
-          </a:p>
-          <a:p>
-            <a:pPr marL="201168" indent="-201168">
-              <a:spcAft>
-                <a:spcPts val="500"/>
-              </a:spcAft>
-              <a:buClr>
-                <a:srgbClr val="1E7568"/>
-              </a:buClr>
-              <a:buFont typeface="Arial"/>
-              <a:buChar char="•"/>
-            </a:pPr>
-            <a:r>
-              <a:rPr sz="1350" b="0">
-                <a:solidFill>
-                  <a:srgbClr val="18211F"/>
-                </a:solidFill>
-                <a:latin typeface="Arial"/>
-              </a:rPr>
-              <a:t>Career gaps trigger suspicion; identity cues trigger more investigation</a:t>
-            </a:r>
-          </a:p>
-          <a:p>
-            <a:pPr marL="201168" indent="-201168">
-              <a:spcAft>
-                <a:spcPts val="500"/>
-              </a:spcAft>
-              <a:buClr>
-                <a:srgbClr val="1E7568"/>
-              </a:buClr>
-              <a:buFont typeface="Arial"/>
-              <a:buChar char="•"/>
-            </a:pPr>
-            <a:r>
-              <a:rPr sz="1350" b="0">
-                <a:solidFill>
-                  <a:srgbClr val="18211F"/>
-                </a:solidFill>
-                <a:latin typeface="Arial"/>
-              </a:rPr>
-              <a:t>Targeted prompt repair: −72.3% total burden, hire rate moves 1.86 pp; generic reminder doesn't help</a:t>
-            </a:r>
-          </a:p>
-        </p:txBody>
-      </p:sp>
-      <p:sp>
-        <p:nvSpPr>
-          <p:cNvPr id="14" name="Rectangle 13"/>
+      <p:sp>
+        <p:nvSpPr>
+          <p:cNvPr id="4" name="Rectangle 3"/>
           <p:cNvSpPr/>
           <p:nvPr/>
         </p:nvSpPr>
         <p:spPr>
           <a:xfrm>
-            <a:off x="8321040" y="1536192"/>
-            <a:ext cx="3319272" cy="4709160"/>
+            <a:off x="548640" y="1325880"/>
+            <a:ext cx="11091672" cy="10972"/>
           </a:xfrm>
           <a:prstGeom prst="rect">
             <a:avLst/>
           </a:prstGeom>
           <a:solidFill>
-            <a:srgbClr val="E3F0ED"/>
+            <a:srgbClr val="C6D0CC"/>
           </a:solidFill>
           <a:ln>
             <a:noFill/>
@@ -7401,14 +7054,14 @@
       </p:sp>
       <p:sp>
         <p:nvSpPr>
-          <p:cNvPr id="15" name="TextBox 14"/>
+          <p:cNvPr id="5" name="TextBox 4"/>
           <p:cNvSpPr txBox="1"/>
           <p:nvPr/>
         </p:nvSpPr>
         <p:spPr>
           <a:xfrm>
-            <a:off x="8549640" y="1737360"/>
-            <a:ext cx="2880360" cy="457200"/>
+            <a:off x="10881360" y="6446520"/>
+            <a:ext cx="758952" cy="228600"/>
           </a:xfrm>
           <a:prstGeom prst="rect">
             <a:avLst/>
@@ -7421,29 +7074,29 @@
           </a:bodyPr>
           <a:lstStyle/>
           <a:p>
-            <a:pPr algn="l"/>
-            <a:r>
-              <a:rPr sz="1050" b="1" i="0">
-                <a:solidFill>
-                  <a:srgbClr val="1E7568"/>
-                </a:solidFill>
-                <a:latin typeface="Arial"/>
-              </a:rPr>
-              <a:t>HOW THEY EVALUATE</a:t>
-            </a:r>
-          </a:p>
-        </p:txBody>
-      </p:sp>
-      <p:sp>
-        <p:nvSpPr>
-          <p:cNvPr id="16" name="TextBox 15"/>
+            <a:pPr algn="r"/>
+            <a:r>
+              <a:rPr sz="1000" b="0" i="0">
+                <a:solidFill>
+                  <a:srgbClr val="5B6964"/>
+                </a:solidFill>
+                <a:latin typeface="Arial"/>
+              </a:rPr>
+              <a:t>5</a:t>
+            </a:r>
+          </a:p>
+        </p:txBody>
+      </p:sp>
+      <p:sp>
+        <p:nvSpPr>
+          <p:cNvPr id="6" name="TextBox 5"/>
           <p:cNvSpPr txBox="1"/>
           <p:nvPr/>
         </p:nvSpPr>
         <p:spPr>
           <a:xfrm>
-            <a:off x="8549640" y="2103120"/>
-            <a:ext cx="2880360" cy="4023360"/>
+            <a:off x="548640" y="6446520"/>
+            <a:ext cx="7315200" cy="228600"/>
           </a:xfrm>
           <a:prstGeom prst="rect">
             <a:avLst/>
@@ -7451,6 +7104,513 @@
           <a:noFill/>
         </p:spPr>
         <p:txBody>
+          <a:bodyPr wrap="square" lIns="0" rIns="0" tIns="0" bIns="0" anchor="t">
+            <a:spAutoFit/>
+          </a:bodyPr>
+          <a:lstStyle/>
+          <a:p>
+            <a:pPr algn="l"/>
+            <a:r>
+              <a:rPr sz="1000" b="0" i="0">
+                <a:solidFill>
+                  <a:srgbClr val="5B6964"/>
+                </a:solidFill>
+                <a:latin typeface="Arial"/>
+              </a:rPr>
+              <a:t>Related work for FAIR-TRACE / SCAFF · 2026-09-11</a:t>
+            </a:r>
+          </a:p>
+        </p:txBody>
+      </p:sp>
+      <p:sp>
+        <p:nvSpPr>
+          <p:cNvPr id="7" name="TextBox 6"/>
+          <p:cNvSpPr txBox="1"/>
+          <p:nvPr/>
+        </p:nvSpPr>
+        <p:spPr>
+          <a:xfrm>
+            <a:off x="548640" y="1536192"/>
+            <a:ext cx="7406640" cy="457200"/>
+          </a:xfrm>
+          <a:prstGeom prst="rect">
+            <a:avLst/>
+          </a:prstGeom>
+          <a:noFill/>
+        </p:spPr>
+        <p:txBody>
+          <a:bodyPr wrap="square" lIns="0" rIns="0" tIns="0" bIns="0" anchor="t">
+            <a:spAutoFit/>
+          </a:bodyPr>
+          <a:lstStyle/>
+          <a:p>
+            <a:pPr algn="l"/>
+            <a:r>
+              <a:rPr sz="1500" b="1" i="0">
+                <a:solidFill>
+                  <a:srgbClr val="1E7568"/>
+                </a:solidFill>
+                <a:latin typeface="Arial"/>
+              </a:rPr>
+              <a:t>Question  </a:t>
+            </a:r>
+            <a:r>
+              <a:rPr sz="1500" b="0" i="0">
+                <a:solidFill>
+                  <a:srgbClr val="18211F"/>
+                </a:solidFill>
+                <a:latin typeface="Arial"/>
+              </a:rPr>
+              <a:t>Can balanced final outcomes hide unfair treatment inside a multi-agent process?</a:t>
+            </a:r>
+          </a:p>
+        </p:txBody>
+      </p:sp>
+      <p:sp>
+        <p:nvSpPr>
+          <p:cNvPr id="8" name="TextBox 7"/>
+          <p:cNvSpPr txBox="1"/>
+          <p:nvPr/>
+        </p:nvSpPr>
+        <p:spPr>
+          <a:xfrm>
+            <a:off x="548640" y="2148840"/>
+            <a:ext cx="7406640" cy="228600"/>
+          </a:xfrm>
+          <a:prstGeom prst="rect">
+            <a:avLst/>
+          </a:prstGeom>
+          <a:noFill/>
+        </p:spPr>
+        <p:txBody>
+          <a:bodyPr wrap="square" lIns="0" rIns="0" tIns="0" bIns="0" anchor="t">
+            <a:spAutoFit/>
+          </a:bodyPr>
+          <a:lstStyle/>
+          <a:p>
+            <a:pPr algn="l"/>
+            <a:r>
+              <a:rPr sz="1050" b="1" i="0">
+                <a:solidFill>
+                  <a:srgbClr val="5B6964"/>
+                </a:solidFill>
+                <a:latin typeface="Arial"/>
+              </a:rPr>
+              <a:t>SETUP</a:t>
+            </a:r>
+          </a:p>
+        </p:txBody>
+      </p:sp>
+      <p:sp>
+        <p:nvSpPr>
+          <p:cNvPr id="9" name="TextBox 8"/>
+          <p:cNvSpPr txBox="1"/>
+          <p:nvPr/>
+        </p:nvSpPr>
+        <p:spPr>
+          <a:xfrm>
+            <a:off x="548640" y="2423160"/>
+            <a:ext cx="7406640" cy="731520"/>
+          </a:xfrm>
+          <a:prstGeom prst="rect">
+            <a:avLst/>
+          </a:prstGeom>
+          <a:noFill/>
+        </p:spPr>
+        <p:txBody>
+          <a:bodyPr wrap="square" lIns="0" rIns="0" tIns="0" bIns="0">
+            <a:spAutoFit/>
+          </a:bodyPr>
+          <a:lstStyle/>
+          <a:p>
+            <a:pPr marL="201168" indent="-201168">
+              <a:spcAft>
+                <a:spcPts val="500"/>
+              </a:spcAft>
+            </a:pPr>
+            <a:r>
+              <a:rPr sz="1350">
+                <a:solidFill>
+                  <a:srgbClr val="1E7568"/>
+                </a:solidFill>
+                <a:latin typeface="Arial"/>
+              </a:rPr>
+              <a:t>•  </a:t>
+            </a:r>
+            <a:r>
+              <a:rPr sz="1350" b="0">
+                <a:solidFill>
+                  <a:srgbClr val="18211F"/>
+                </a:solidFill>
+                <a:latin typeface="Arial"/>
+              </a:rPr>
+              <a:t>Committee: 3 screeners → 3 executives; debate, votes, private assessments logged</a:t>
+            </a:r>
+          </a:p>
+          <a:p>
+            <a:pPr marL="201168" indent="-201168">
+              <a:spcAft>
+                <a:spcPts val="500"/>
+              </a:spcAft>
+            </a:pPr>
+            <a:r>
+              <a:rPr sz="1350">
+                <a:solidFill>
+                  <a:srgbClr val="1E7568"/>
+                </a:solidFill>
+                <a:latin typeface="Arial"/>
+              </a:rPr>
+              <a:t>•  </a:t>
+            </a:r>
+            <a:r>
+              <a:rPr sz="1350" b="0">
+                <a:solidFill>
+                  <a:srgbClr val="18211F"/>
+                </a:solidFill>
+                <a:latin typeface="Arial"/>
+              </a:rPr>
+              <a:t>Resume variants from real CVs change one cue, merit fixed; 311K trajectories, 3 LLMs</a:t>
+            </a:r>
+          </a:p>
+        </p:txBody>
+      </p:sp>
+      <p:sp>
+        <p:nvSpPr>
+          <p:cNvPr id="10" name="TextBox 9"/>
+          <p:cNvSpPr txBox="1"/>
+          <p:nvPr/>
+        </p:nvSpPr>
+        <p:spPr>
+          <a:xfrm>
+            <a:off x="548640" y="3264408"/>
+            <a:ext cx="7406640" cy="228600"/>
+          </a:xfrm>
+          <a:prstGeom prst="rect">
+            <a:avLst/>
+          </a:prstGeom>
+          <a:noFill/>
+        </p:spPr>
+        <p:txBody>
+          <a:bodyPr wrap="square" lIns="0" rIns="0" tIns="0" bIns="0" anchor="t">
+            <a:spAutoFit/>
+          </a:bodyPr>
+          <a:lstStyle/>
+          <a:p>
+            <a:pPr algn="l"/>
+            <a:r>
+              <a:rPr sz="1050" b="1" i="0">
+                <a:solidFill>
+                  <a:srgbClr val="5B6964"/>
+                </a:solidFill>
+                <a:latin typeface="Arial"/>
+              </a:rPr>
+              <a:t>METRICS · SIX LENSES</a:t>
+            </a:r>
+          </a:p>
+        </p:txBody>
+      </p:sp>
+      <p:sp>
+        <p:nvSpPr>
+          <p:cNvPr id="11" name="TextBox 10"/>
+          <p:cNvSpPr txBox="1"/>
+          <p:nvPr/>
+        </p:nvSpPr>
+        <p:spPr>
+          <a:xfrm>
+            <a:off x="548640" y="3538728"/>
+            <a:ext cx="7406640" cy="731520"/>
+          </a:xfrm>
+          <a:prstGeom prst="rect">
+            <a:avLst/>
+          </a:prstGeom>
+          <a:noFill/>
+        </p:spPr>
+        <p:txBody>
+          <a:bodyPr wrap="square" lIns="0" rIns="0" tIns="0" bIns="0">
+            <a:spAutoFit/>
+          </a:bodyPr>
+          <a:lstStyle/>
+          <a:p>
+            <a:pPr marL="201168" indent="-201168">
+              <a:spcAft>
+                <a:spcPts val="500"/>
+              </a:spcAft>
+            </a:pPr>
+            <a:r>
+              <a:rPr sz="1350">
+                <a:solidFill>
+                  <a:srgbClr val="1E7568"/>
+                </a:solidFill>
+                <a:latin typeface="Arial"/>
+              </a:rPr>
+              <a:t>•  </a:t>
+            </a:r>
+            <a:r>
+              <a:rPr sz="1350" b="0">
+                <a:solidFill>
+                  <a:srgbClr val="18211F"/>
+                </a:solidFill>
+                <a:latin typeface="Arial"/>
+              </a:rPr>
+              <a:t>Outcome · counterfactual (flip rate, score ATE) · process (investigation requests, bias language)</a:t>
+            </a:r>
+          </a:p>
+          <a:p>
+            <a:pPr marL="201168" indent="-201168">
+              <a:spcAft>
+                <a:spcPts val="500"/>
+              </a:spcAft>
+            </a:pPr>
+            <a:r>
+              <a:rPr sz="1350">
+                <a:solidFill>
+                  <a:srgbClr val="1E7568"/>
+                </a:solidFill>
+                <a:latin typeface="Arial"/>
+              </a:rPr>
+              <a:t>•  </a:t>
+            </a:r>
+            <a:r>
+              <a:rPr sz="1350" b="0">
+                <a:solidFill>
+                  <a:srgbClr val="18211F"/>
+                </a:solidFill>
+                <a:latin typeface="Arial"/>
+              </a:rPr>
+              <a:t>Pathway (Stage-1 pass gap vs. Stage-2 conversion gap) · debate dynamics · design effects</a:t>
+            </a:r>
+          </a:p>
+        </p:txBody>
+      </p:sp>
+      <p:sp>
+        <p:nvSpPr>
+          <p:cNvPr id="12" name="TextBox 11"/>
+          <p:cNvSpPr txBox="1"/>
+          <p:nvPr/>
+        </p:nvSpPr>
+        <p:spPr>
+          <a:xfrm>
+            <a:off x="548640" y="4379976"/>
+            <a:ext cx="7406640" cy="228600"/>
+          </a:xfrm>
+          <a:prstGeom prst="rect">
+            <a:avLst/>
+          </a:prstGeom>
+          <a:noFill/>
+        </p:spPr>
+        <p:txBody>
+          <a:bodyPr wrap="square" lIns="0" rIns="0" tIns="0" bIns="0" anchor="t">
+            <a:spAutoFit/>
+          </a:bodyPr>
+          <a:lstStyle/>
+          <a:p>
+            <a:pPr algn="l"/>
+            <a:r>
+              <a:rPr sz="1050" b="1" i="0">
+                <a:solidFill>
+                  <a:srgbClr val="5B6964"/>
+                </a:solidFill>
+                <a:latin typeface="Arial"/>
+              </a:rPr>
+              <a:t>FINDINGS</a:t>
+            </a:r>
+          </a:p>
+        </p:txBody>
+      </p:sp>
+      <p:sp>
+        <p:nvSpPr>
+          <p:cNvPr id="13" name="TextBox 12"/>
+          <p:cNvSpPr txBox="1"/>
+          <p:nvPr/>
+        </p:nvSpPr>
+        <p:spPr>
+          <a:xfrm>
+            <a:off x="548640" y="4654296"/>
+            <a:ext cx="7406640" cy="1188720"/>
+          </a:xfrm>
+          <a:prstGeom prst="rect">
+            <a:avLst/>
+          </a:prstGeom>
+          <a:noFill/>
+        </p:spPr>
+        <p:txBody>
+          <a:bodyPr wrap="square" lIns="0" rIns="0" tIns="0" bIns="0">
+            <a:spAutoFit/>
+          </a:bodyPr>
+          <a:lstStyle/>
+          <a:p>
+            <a:pPr marL="201168" indent="-201168">
+              <a:spcAft>
+                <a:spcPts val="500"/>
+              </a:spcAft>
+            </a:pPr>
+            <a:r>
+              <a:rPr sz="1350">
+                <a:solidFill>
+                  <a:srgbClr val="1E7568"/>
+                </a:solidFill>
+                <a:latin typeface="Arial"/>
+              </a:rPr>
+              <a:t>•  </a:t>
+            </a:r>
+            <a:r>
+              <a:rPr sz="1350" b="0">
+                <a:solidFill>
+                  <a:srgbClr val="18211F"/>
+                </a:solidFill>
+                <a:latin typeface="Arial"/>
+              </a:rPr>
+              <a:t>Process-level signals 2.7–4.7× larger than outcome-level signals</a:t>
+            </a:r>
+          </a:p>
+          <a:p>
+            <a:pPr marL="201168" indent="-201168">
+              <a:spcAft>
+                <a:spcPts val="500"/>
+              </a:spcAft>
+            </a:pPr>
+            <a:r>
+              <a:rPr sz="1350">
+                <a:solidFill>
+                  <a:srgbClr val="1E7568"/>
+                </a:solidFill>
+                <a:latin typeface="Arial"/>
+              </a:rPr>
+              <a:t>•  </a:t>
+            </a:r>
+            <a:r>
+              <a:rPr sz="1350" b="0">
+                <a:solidFill>
+                  <a:srgbClr val="18211F"/>
+                </a:solidFill>
+                <a:latin typeface="Arial"/>
+              </a:rPr>
+              <a:t>Career gaps trigger suspicion; identity cues trigger more investigation</a:t>
+            </a:r>
+          </a:p>
+          <a:p>
+            <a:pPr marL="201168" indent="-201168">
+              <a:spcAft>
+                <a:spcPts val="500"/>
+              </a:spcAft>
+            </a:pPr>
+            <a:r>
+              <a:rPr sz="1350">
+                <a:solidFill>
+                  <a:srgbClr val="1E7568"/>
+                </a:solidFill>
+                <a:latin typeface="Arial"/>
+              </a:rPr>
+              <a:t>•  </a:t>
+            </a:r>
+            <a:r>
+              <a:rPr sz="1350" b="0">
+                <a:solidFill>
+                  <a:srgbClr val="18211F"/>
+                </a:solidFill>
+                <a:latin typeface="Arial"/>
+              </a:rPr>
+              <a:t>Targeted prompt repair: −72.3% total burden, hire rate moves 1.86 pp; generic reminder doesn't help</a:t>
+            </a:r>
+          </a:p>
+        </p:txBody>
+      </p:sp>
+      <p:sp>
+        <p:nvSpPr>
+          <p:cNvPr id="14" name="Rectangle 13"/>
+          <p:cNvSpPr/>
+          <p:nvPr/>
+        </p:nvSpPr>
+        <p:spPr>
+          <a:xfrm>
+            <a:off x="8321040" y="1536192"/>
+            <a:ext cx="3319272" cy="4709160"/>
+          </a:xfrm>
+          <a:prstGeom prst="rect">
+            <a:avLst/>
+          </a:prstGeom>
+          <a:solidFill>
+            <a:srgbClr val="E3F0ED"/>
+          </a:solidFill>
+          <a:ln>
+            <a:noFill/>
+          </a:ln>
+          <a:effectLst/>
+        </p:spPr>
+        <p:style>
+          <a:lnRef idx="1">
+            <a:schemeClr val="accent1"/>
+          </a:lnRef>
+          <a:fillRef idx="3">
+            <a:schemeClr val="accent1"/>
+          </a:fillRef>
+          <a:effectRef idx="2">
+            <a:schemeClr val="accent1"/>
+          </a:effectRef>
+          <a:fontRef idx="minor">
+            <a:schemeClr val="lt1"/>
+          </a:fontRef>
+        </p:style>
+        <p:txBody>
+          <a:bodyPr rtlCol="0" anchor="ctr"/>
+          <a:lstStyle/>
+          <a:p>
+            <a:pPr algn="ctr"/>
+          </a:p>
+        </p:txBody>
+      </p:sp>
+      <p:sp>
+        <p:nvSpPr>
+          <p:cNvPr id="15" name="TextBox 14"/>
+          <p:cNvSpPr txBox="1"/>
+          <p:nvPr/>
+        </p:nvSpPr>
+        <p:spPr>
+          <a:xfrm>
+            <a:off x="8549640" y="1737360"/>
+            <a:ext cx="2880360" cy="457200"/>
+          </a:xfrm>
+          <a:prstGeom prst="rect">
+            <a:avLst/>
+          </a:prstGeom>
+          <a:noFill/>
+        </p:spPr>
+        <p:txBody>
+          <a:bodyPr wrap="square" lIns="0" rIns="0" tIns="0" bIns="0" anchor="t">
+            <a:spAutoFit/>
+          </a:bodyPr>
+          <a:lstStyle/>
+          <a:p>
+            <a:pPr algn="l"/>
+            <a:r>
+              <a:rPr sz="1050" b="1" i="0">
+                <a:solidFill>
+                  <a:srgbClr val="1E7568"/>
+                </a:solidFill>
+                <a:latin typeface="Arial"/>
+              </a:rPr>
+              <a:t>HOW THEY EVALUATE</a:t>
+            </a:r>
+          </a:p>
+        </p:txBody>
+      </p:sp>
+      <p:sp>
+        <p:nvSpPr>
+          <p:cNvPr id="16" name="TextBox 15"/>
+          <p:cNvSpPr txBox="1"/>
+          <p:nvPr/>
+        </p:nvSpPr>
+        <p:spPr>
+          <a:xfrm>
+            <a:off x="8549640" y="2103120"/>
+            <a:ext cx="2880360" cy="4023360"/>
+          </a:xfrm>
+          <a:prstGeom prst="rect">
+            <a:avLst/>
+          </a:prstGeom>
+          <a:noFill/>
+        </p:spPr>
+        <p:txBody>
           <a:bodyPr wrap="square" lIns="0" rIns="0" tIns="0" bIns="0">
             <a:spAutoFit/>
           </a:bodyPr>
@@ -7460,12 +7620,16 @@
               <a:spcAft>
                 <a:spcPts val="800"/>
               </a:spcAft>
-              <a:buClr>
-                <a:srgbClr val="1E7568"/>
-              </a:buClr>
-              <a:buFont typeface="Arial"/>
-              <a:buChar char="•"/>
             </a:pPr>
+            <a:r>
+              <a:rPr sz="1300">
+                <a:solidFill>
+                  <a:srgbClr val="1E7568"/>
+                </a:solidFill>
+                <a:latin typeface="Arial"/>
+              </a:rPr>
+              <a:t>•  </a:t>
+            </a:r>
             <a:r>
               <a:rPr sz="1300" b="0">
                 <a:solidFill>
@@ -7481,12 +7645,16 @@
               <a:spcAft>
                 <a:spcPts val="800"/>
               </a:spcAft>
-              <a:buClr>
-                <a:srgbClr val="1E7568"/>
-              </a:buClr>
-              <a:buFont typeface="Arial"/>
-              <a:buChar char="•"/>
             </a:pPr>
+            <a:r>
+              <a:rPr sz="1300">
+                <a:solidFill>
+                  <a:srgbClr val="1E7568"/>
+                </a:solidFill>
+                <a:latin typeface="Arial"/>
+              </a:rPr>
+              <a:t>•  </a:t>
+            </a:r>
             <a:r>
               <a:rPr sz="1300" b="0">
                 <a:solidFill>
@@ -7502,12 +7670,16 @@
               <a:spcAft>
                 <a:spcPts val="800"/>
               </a:spcAft>
-              <a:buClr>
-                <a:srgbClr val="1E7568"/>
-              </a:buClr>
-              <a:buFont typeface="Arial"/>
-              <a:buChar char="•"/>
             </a:pPr>
+            <a:r>
+              <a:rPr sz="1300">
+                <a:solidFill>
+                  <a:srgbClr val="1E7568"/>
+                </a:solidFill>
+                <a:latin typeface="Arial"/>
+              </a:rPr>
+              <a:t>•  </a:t>
+            </a:r>
             <a:r>
               <a:rPr sz="1300" b="0">
                 <a:solidFill>
@@ -7523,12 +7695,16 @@
               <a:spcAft>
                 <a:spcPts val="800"/>
               </a:spcAft>
-              <a:buClr>
-                <a:srgbClr val="1E7568"/>
-              </a:buClr>
-              <a:buFont typeface="Arial"/>
-              <a:buChar char="•"/>
             </a:pPr>
+            <a:r>
+              <a:rPr sz="1300">
+                <a:solidFill>
+                  <a:srgbClr val="1E7568"/>
+                </a:solidFill>
+                <a:latin typeface="Arial"/>
+              </a:rPr>
+              <a:t>•  </a:t>
+            </a:r>
             <a:r>
               <a:rPr sz="1300" b="1">
                 <a:solidFill>
@@ -7646,492 +7822,22 @@
           </a:p>
         </p:txBody>
       </p:sp>
-      <p:cxnSp>
-        <p:nvCxnSpPr>
-          <p:cNvPr id="4" name="Connector 3"/>
-          <p:cNvCxnSpPr/>
-          <p:nvPr/>
-        </p:nvCxnSpPr>
-        <p:spPr>
-          <a:xfrm>
-            <a:off x="548640" y="1325880"/>
-            <a:ext cx="11091672" cy="0"/>
-          </a:xfrm>
-          <a:prstGeom prst="line">
-            <a:avLst/>
-          </a:prstGeom>
-          <a:ln w="9525">
-            <a:solidFill>
-              <a:srgbClr val="C6D0CC"/>
-            </a:solidFill>
-          </a:ln>
-        </p:spPr>
-        <p:style>
-          <a:lnRef idx="2">
-            <a:schemeClr val="accent1"/>
-          </a:lnRef>
-          <a:fillRef idx="0">
-            <a:schemeClr val="accent1"/>
-          </a:fillRef>
-          <a:effectRef idx="1">
-            <a:schemeClr val="accent1"/>
-          </a:effectRef>
-          <a:fontRef idx="minor">
-            <a:schemeClr val="tx1"/>
-          </a:fontRef>
-        </p:style>
-      </p:cxnSp>
-      <p:sp>
-        <p:nvSpPr>
-          <p:cNvPr id="5" name="TextBox 4"/>
-          <p:cNvSpPr txBox="1"/>
-          <p:nvPr/>
-        </p:nvSpPr>
-        <p:spPr>
-          <a:xfrm>
-            <a:off x="10881360" y="6446520"/>
-            <a:ext cx="758952" cy="228600"/>
-          </a:xfrm>
-          <a:prstGeom prst="rect">
-            <a:avLst/>
-          </a:prstGeom>
-          <a:noFill/>
-        </p:spPr>
-        <p:txBody>
-          <a:bodyPr wrap="square" lIns="0" rIns="0" tIns="0" bIns="0" anchor="t">
-            <a:spAutoFit/>
-          </a:bodyPr>
-          <a:lstStyle/>
-          <a:p>
-            <a:pPr algn="r"/>
-            <a:r>
-              <a:rPr sz="1000" b="0" i="0">
-                <a:solidFill>
-                  <a:srgbClr val="5B6964"/>
-                </a:solidFill>
-                <a:latin typeface="Arial"/>
-              </a:rPr>
-              <a:t>6</a:t>
-            </a:r>
-          </a:p>
-        </p:txBody>
-      </p:sp>
-      <p:sp>
-        <p:nvSpPr>
-          <p:cNvPr id="6" name="TextBox 5"/>
-          <p:cNvSpPr txBox="1"/>
-          <p:nvPr/>
-        </p:nvSpPr>
-        <p:spPr>
-          <a:xfrm>
-            <a:off x="548640" y="6446520"/>
-            <a:ext cx="7315200" cy="228600"/>
-          </a:xfrm>
-          <a:prstGeom prst="rect">
-            <a:avLst/>
-          </a:prstGeom>
-          <a:noFill/>
-        </p:spPr>
-        <p:txBody>
-          <a:bodyPr wrap="square" lIns="0" rIns="0" tIns="0" bIns="0" anchor="t">
-            <a:spAutoFit/>
-          </a:bodyPr>
-          <a:lstStyle/>
-          <a:p>
-            <a:pPr algn="l"/>
-            <a:r>
-              <a:rPr sz="1000" b="0" i="0">
-                <a:solidFill>
-                  <a:srgbClr val="5B6964"/>
-                </a:solidFill>
-                <a:latin typeface="Arial"/>
-              </a:rPr>
-              <a:t>Related work for FAIR-TRACE / SCAFF · 2026-09-11</a:t>
-            </a:r>
-          </a:p>
-        </p:txBody>
-      </p:sp>
-      <p:sp>
-        <p:nvSpPr>
-          <p:cNvPr id="7" name="TextBox 6"/>
-          <p:cNvSpPr txBox="1"/>
-          <p:nvPr/>
-        </p:nvSpPr>
-        <p:spPr>
-          <a:xfrm>
-            <a:off x="548640" y="1536192"/>
-            <a:ext cx="7406640" cy="457200"/>
-          </a:xfrm>
-          <a:prstGeom prst="rect">
-            <a:avLst/>
-          </a:prstGeom>
-          <a:noFill/>
-        </p:spPr>
-        <p:txBody>
-          <a:bodyPr wrap="square" lIns="0" rIns="0" tIns="0" bIns="0" anchor="t">
-            <a:spAutoFit/>
-          </a:bodyPr>
-          <a:lstStyle/>
-          <a:p>
-            <a:pPr algn="l"/>
-            <a:r>
-              <a:rPr sz="1500" b="1" i="0">
-                <a:solidFill>
-                  <a:srgbClr val="1E7568"/>
-                </a:solidFill>
-                <a:latin typeface="Arial"/>
-              </a:rPr>
-              <a:t>Question  </a:t>
-            </a:r>
-            <a:r>
-              <a:rPr sz="1500" b="0" i="0">
-                <a:solidFill>
-                  <a:srgbClr val="18211F"/>
-                </a:solidFill>
-                <a:latin typeface="Arial"/>
-              </a:rPr>
-              <a:t>Do agents treat matched profiles differently in actions, not just answers?</a:t>
-            </a:r>
-          </a:p>
-        </p:txBody>
-      </p:sp>
-      <p:sp>
-        <p:nvSpPr>
-          <p:cNvPr id="8" name="TextBox 7"/>
-          <p:cNvSpPr txBox="1"/>
-          <p:nvPr/>
-        </p:nvSpPr>
-        <p:spPr>
-          <a:xfrm>
-            <a:off x="548640" y="2148840"/>
-            <a:ext cx="7406640" cy="228600"/>
-          </a:xfrm>
-          <a:prstGeom prst="rect">
-            <a:avLst/>
-          </a:prstGeom>
-          <a:noFill/>
-        </p:spPr>
-        <p:txBody>
-          <a:bodyPr wrap="square" lIns="0" rIns="0" tIns="0" bIns="0" anchor="t">
-            <a:spAutoFit/>
-          </a:bodyPr>
-          <a:lstStyle/>
-          <a:p>
-            <a:pPr algn="l"/>
-            <a:r>
-              <a:rPr sz="1050" b="1" i="0">
-                <a:solidFill>
-                  <a:srgbClr val="5B6964"/>
-                </a:solidFill>
-                <a:latin typeface="Arial"/>
-              </a:rPr>
-              <a:t>SETUP</a:t>
-            </a:r>
-          </a:p>
-        </p:txBody>
-      </p:sp>
-      <p:sp>
-        <p:nvSpPr>
-          <p:cNvPr id="9" name="TextBox 8"/>
-          <p:cNvSpPr txBox="1"/>
-          <p:nvPr/>
-        </p:nvSpPr>
-        <p:spPr>
-          <a:xfrm>
-            <a:off x="548640" y="2423160"/>
-            <a:ext cx="7406640" cy="731520"/>
-          </a:xfrm>
-          <a:prstGeom prst="rect">
-            <a:avLst/>
-          </a:prstGeom>
-          <a:noFill/>
-        </p:spPr>
-        <p:txBody>
-          <a:bodyPr wrap="square" lIns="0" rIns="0" tIns="0" bIns="0">
-            <a:spAutoFit/>
-          </a:bodyPr>
-          <a:lstStyle/>
-          <a:p>
-            <a:pPr marL="201168" indent="-201168">
-              <a:spcAft>
-                <a:spcPts val="500"/>
-              </a:spcAft>
-              <a:buClr>
-                <a:srgbClr val="1E7568"/>
-              </a:buClr>
-              <a:buFont typeface="Arial"/>
-              <a:buChar char="•"/>
-            </a:pPr>
-            <a:r>
-              <a:rPr sz="1350" b="0">
-                <a:solidFill>
-                  <a:srgbClr val="18211F"/>
-                </a:solidFill>
-                <a:latin typeface="Arial"/>
-              </a:rPr>
-              <a:t>Hiring, lending, medical triage; synthetic profiles in matched sets</a:t>
-            </a:r>
-          </a:p>
-          <a:p>
-            <a:pPr marL="201168" indent="-201168">
-              <a:spcAft>
-                <a:spcPts val="500"/>
-              </a:spcAft>
-              <a:buClr>
-                <a:srgbClr val="1E7568"/>
-              </a:buClr>
-              <a:buFont typeface="Arial"/>
-              <a:buChar char="•"/>
-            </a:pPr>
-            <a:r>
-              <a:rPr sz="1350" b="0">
-                <a:solidFill>
-                  <a:srgbClr val="18211F"/>
-                </a:solidFill>
-                <a:latin typeface="Arial"/>
-              </a:rPr>
-              <a:t>Only a name-coded race × gender signal varies; 4 scaffolds (direct, CoT, panel, info request)</a:t>
-            </a:r>
-          </a:p>
-        </p:txBody>
-      </p:sp>
-      <p:sp>
-        <p:nvSpPr>
-          <p:cNvPr id="10" name="TextBox 9"/>
-          <p:cNvSpPr txBox="1"/>
-          <p:nvPr/>
-        </p:nvSpPr>
-        <p:spPr>
-          <a:xfrm>
-            <a:off x="548640" y="3264408"/>
-            <a:ext cx="7406640" cy="228600"/>
-          </a:xfrm>
-          <a:prstGeom prst="rect">
-            <a:avLst/>
-          </a:prstGeom>
-          <a:noFill/>
-        </p:spPr>
-        <p:txBody>
-          <a:bodyPr wrap="square" lIns="0" rIns="0" tIns="0" bIns="0" anchor="t">
-            <a:spAutoFit/>
-          </a:bodyPr>
-          <a:lstStyle/>
-          <a:p>
-            <a:pPr algn="l"/>
-            <a:r>
-              <a:rPr sz="1050" b="1" i="0">
-                <a:solidFill>
-                  <a:srgbClr val="5B6964"/>
-                </a:solidFill>
-                <a:latin typeface="Arial"/>
-              </a:rPr>
-              <a:t>METRICS</a:t>
-            </a:r>
-          </a:p>
-        </p:txBody>
-      </p:sp>
-      <p:sp>
-        <p:nvSpPr>
-          <p:cNvPr id="11" name="TextBox 10"/>
-          <p:cNvSpPr txBox="1"/>
-          <p:nvPr/>
-        </p:nvSpPr>
-        <p:spPr>
-          <a:xfrm>
-            <a:off x="548640" y="3538728"/>
-            <a:ext cx="7406640" cy="731520"/>
-          </a:xfrm>
-          <a:prstGeom prst="rect">
-            <a:avLst/>
-          </a:prstGeom>
-          <a:noFill/>
-        </p:spPr>
-        <p:txBody>
-          <a:bodyPr wrap="square" lIns="0" rIns="0" tIns="0" bIns="0">
-            <a:spAutoFit/>
-          </a:bodyPr>
-          <a:lstStyle/>
-          <a:p>
-            <a:pPr marL="201168" indent="-201168">
-              <a:spcAft>
-                <a:spcPts val="500"/>
-              </a:spcAft>
-              <a:buClr>
-                <a:srgbClr val="1E7568"/>
-              </a:buClr>
-              <a:buFont typeface="Arial"/>
-              <a:buChar char="•"/>
-            </a:pPr>
-            <a:r>
-              <a:rPr sz="1350" b="0">
-                <a:solidFill>
-                  <a:srgbClr val="18211F"/>
-                </a:solidFill>
-                <a:latin typeface="Arial"/>
-              </a:rPr>
-              <a:t>Flip rate, score spread, action-rate gap, info-request gap</a:t>
-            </a:r>
-          </a:p>
-          <a:p>
-            <a:pPr marL="201168" indent="-201168">
-              <a:spcAft>
-                <a:spcPts val="500"/>
-              </a:spcAft>
-              <a:buClr>
-                <a:srgbClr val="1E7568"/>
-              </a:buClr>
-              <a:buFont typeface="Arial"/>
-              <a:buChar char="•"/>
-            </a:pPr>
-            <a:r>
-              <a:rPr sz="1350" b="0">
-                <a:solidFill>
-                  <a:srgbClr val="18211F"/>
-                </a:solidFill>
-                <a:latin typeface="Arial"/>
-              </a:rPr>
-              <a:t>Bootstrap CIs, permutation tests, false-discovery-rate control; test–retest reruns</a:t>
-            </a:r>
-          </a:p>
-        </p:txBody>
-      </p:sp>
-      <p:sp>
-        <p:nvSpPr>
-          <p:cNvPr id="12" name="TextBox 11"/>
-          <p:cNvSpPr txBox="1"/>
-          <p:nvPr/>
-        </p:nvSpPr>
-        <p:spPr>
-          <a:xfrm>
-            <a:off x="548640" y="4379976"/>
-            <a:ext cx="7406640" cy="228600"/>
-          </a:xfrm>
-          <a:prstGeom prst="rect">
-            <a:avLst/>
-          </a:prstGeom>
-          <a:noFill/>
-        </p:spPr>
-        <p:txBody>
-          <a:bodyPr wrap="square" lIns="0" rIns="0" tIns="0" bIns="0" anchor="t">
-            <a:spAutoFit/>
-          </a:bodyPr>
-          <a:lstStyle/>
-          <a:p>
-            <a:pPr algn="l"/>
-            <a:r>
-              <a:rPr sz="1050" b="1" i="0">
-                <a:solidFill>
-                  <a:srgbClr val="5B6964"/>
-                </a:solidFill>
-                <a:latin typeface="Arial"/>
-              </a:rPr>
-              <a:t>FINDINGS</a:t>
-            </a:r>
-          </a:p>
-        </p:txBody>
-      </p:sp>
-      <p:sp>
-        <p:nvSpPr>
-          <p:cNvPr id="13" name="TextBox 12"/>
-          <p:cNvSpPr txBox="1"/>
-          <p:nvPr/>
-        </p:nvSpPr>
-        <p:spPr>
-          <a:xfrm>
-            <a:off x="548640" y="4654296"/>
-            <a:ext cx="7406640" cy="1188720"/>
-          </a:xfrm>
-          <a:prstGeom prst="rect">
-            <a:avLst/>
-          </a:prstGeom>
-          <a:noFill/>
-        </p:spPr>
-        <p:txBody>
-          <a:bodyPr wrap="square" lIns="0" rIns="0" tIns="0" bIns="0">
-            <a:spAutoFit/>
-          </a:bodyPr>
-          <a:lstStyle/>
-          <a:p>
-            <a:pPr marL="201168" indent="-201168">
-              <a:spcAft>
-                <a:spcPts val="500"/>
-              </a:spcAft>
-              <a:buClr>
-                <a:srgbClr val="1E7568"/>
-              </a:buClr>
-              <a:buFont typeface="Arial"/>
-              <a:buChar char="•"/>
-            </a:pPr>
-            <a:r>
-              <a:rPr sz="1350" b="0">
-                <a:solidFill>
-                  <a:srgbClr val="18211F"/>
-                </a:solidFill>
-                <a:latin typeface="Arial"/>
-              </a:rPr>
-              <a:t>A six-group range vs. a two-run noise gap overstates disparity ≈2.25× by arity alone</a:t>
-            </a:r>
-          </a:p>
-          <a:p>
-            <a:pPr marL="201168" indent="-201168">
-              <a:spcAft>
-                <a:spcPts val="500"/>
-              </a:spcAft>
-              <a:buClr>
-                <a:srgbClr val="1E7568"/>
-              </a:buClr>
-              <a:buFont typeface="Arial"/>
-              <a:buChar char="•"/>
-            </a:pPr>
-            <a:r>
-              <a:rPr sz="1350" b="0">
-                <a:solidFill>
-                  <a:srgbClr val="18211F"/>
-                </a:solidFill>
-                <a:latin typeface="Arial"/>
-              </a:rPr>
-              <a:t>Against an arity-matched floor: 0/120 pairwise, 0/9 omnibus contrasts for Claude Haiku 4.5</a:t>
-            </a:r>
-          </a:p>
-          <a:p>
-            <a:pPr marL="201168" indent="-201168">
-              <a:spcAft>
-                <a:spcPts val="500"/>
-              </a:spcAft>
-              <a:buClr>
-                <a:srgbClr val="1E7568"/>
-              </a:buClr>
-              <a:buFont typeface="Arial"/>
-              <a:buChar char="•"/>
-            </a:pPr>
-            <a:r>
-              <a:rPr sz="1350" b="0">
-                <a:solidFill>
-                  <a:srgbClr val="18211F"/>
-                </a:solidFill>
-                <a:latin typeface="Arial"/>
-              </a:rPr>
-              <a:t>A planted-bias test confirms detection (construction barely described)</a:t>
-            </a:r>
-          </a:p>
-        </p:txBody>
-      </p:sp>
-      <p:sp>
-        <p:nvSpPr>
-          <p:cNvPr id="14" name="Rectangle 13"/>
+      <p:sp>
+        <p:nvSpPr>
+          <p:cNvPr id="4" name="Rectangle 3"/>
           <p:cNvSpPr/>
           <p:nvPr/>
         </p:nvSpPr>
         <p:spPr>
           <a:xfrm>
-            <a:off x="8321040" y="1536192"/>
-            <a:ext cx="3319272" cy="4709160"/>
+            <a:off x="548640" y="1325880"/>
+            <a:ext cx="11091672" cy="10972"/>
           </a:xfrm>
           <a:prstGeom prst="rect">
             <a:avLst/>
           </a:prstGeom>
           <a:solidFill>
-            <a:srgbClr val="E3F0ED"/>
+            <a:srgbClr val="C6D0CC"/>
           </a:solidFill>
           <a:ln>
             <a:noFill/>
@@ -8162,14 +7868,14 @@
       </p:sp>
       <p:sp>
         <p:nvSpPr>
-          <p:cNvPr id="15" name="TextBox 14"/>
+          <p:cNvPr id="5" name="TextBox 4"/>
           <p:cNvSpPr txBox="1"/>
           <p:nvPr/>
         </p:nvSpPr>
         <p:spPr>
           <a:xfrm>
-            <a:off x="8549640" y="1737360"/>
-            <a:ext cx="2880360" cy="457200"/>
+            <a:off x="10881360" y="6446520"/>
+            <a:ext cx="758952" cy="228600"/>
           </a:xfrm>
           <a:prstGeom prst="rect">
             <a:avLst/>
@@ -8182,29 +7888,29 @@
           </a:bodyPr>
           <a:lstStyle/>
           <a:p>
-            <a:pPr algn="l"/>
-            <a:r>
-              <a:rPr sz="1050" b="1" i="0">
-                <a:solidFill>
-                  <a:srgbClr val="1E7568"/>
-                </a:solidFill>
-                <a:latin typeface="Arial"/>
-              </a:rPr>
-              <a:t>HOW THEY EVALUATE</a:t>
-            </a:r>
-          </a:p>
-        </p:txBody>
-      </p:sp>
-      <p:sp>
-        <p:nvSpPr>
-          <p:cNvPr id="16" name="TextBox 15"/>
+            <a:pPr algn="r"/>
+            <a:r>
+              <a:rPr sz="1000" b="0" i="0">
+                <a:solidFill>
+                  <a:srgbClr val="5B6964"/>
+                </a:solidFill>
+                <a:latin typeface="Arial"/>
+              </a:rPr>
+              <a:t>6</a:t>
+            </a:r>
+          </a:p>
+        </p:txBody>
+      </p:sp>
+      <p:sp>
+        <p:nvSpPr>
+          <p:cNvPr id="6" name="TextBox 5"/>
           <p:cNvSpPr txBox="1"/>
           <p:nvPr/>
         </p:nvSpPr>
         <p:spPr>
           <a:xfrm>
-            <a:off x="8549640" y="2103120"/>
-            <a:ext cx="2880360" cy="4023360"/>
+            <a:off x="548640" y="6446520"/>
+            <a:ext cx="7315200" cy="228600"/>
           </a:xfrm>
           <a:prstGeom prst="rect">
             <a:avLst/>
@@ -8212,6 +7918,513 @@
           <a:noFill/>
         </p:spPr>
         <p:txBody>
+          <a:bodyPr wrap="square" lIns="0" rIns="0" tIns="0" bIns="0" anchor="t">
+            <a:spAutoFit/>
+          </a:bodyPr>
+          <a:lstStyle/>
+          <a:p>
+            <a:pPr algn="l"/>
+            <a:r>
+              <a:rPr sz="1000" b="0" i="0">
+                <a:solidFill>
+                  <a:srgbClr val="5B6964"/>
+                </a:solidFill>
+                <a:latin typeface="Arial"/>
+              </a:rPr>
+              <a:t>Related work for FAIR-TRACE / SCAFF · 2026-09-11</a:t>
+            </a:r>
+          </a:p>
+        </p:txBody>
+      </p:sp>
+      <p:sp>
+        <p:nvSpPr>
+          <p:cNvPr id="7" name="TextBox 6"/>
+          <p:cNvSpPr txBox="1"/>
+          <p:nvPr/>
+        </p:nvSpPr>
+        <p:spPr>
+          <a:xfrm>
+            <a:off x="548640" y="1536192"/>
+            <a:ext cx="7406640" cy="457200"/>
+          </a:xfrm>
+          <a:prstGeom prst="rect">
+            <a:avLst/>
+          </a:prstGeom>
+          <a:noFill/>
+        </p:spPr>
+        <p:txBody>
+          <a:bodyPr wrap="square" lIns="0" rIns="0" tIns="0" bIns="0" anchor="t">
+            <a:spAutoFit/>
+          </a:bodyPr>
+          <a:lstStyle/>
+          <a:p>
+            <a:pPr algn="l"/>
+            <a:r>
+              <a:rPr sz="1500" b="1" i="0">
+                <a:solidFill>
+                  <a:srgbClr val="1E7568"/>
+                </a:solidFill>
+                <a:latin typeface="Arial"/>
+              </a:rPr>
+              <a:t>Question  </a:t>
+            </a:r>
+            <a:r>
+              <a:rPr sz="1500" b="0" i="0">
+                <a:solidFill>
+                  <a:srgbClr val="18211F"/>
+                </a:solidFill>
+                <a:latin typeface="Arial"/>
+              </a:rPr>
+              <a:t>Do agents treat matched profiles differently in actions, not just answers?</a:t>
+            </a:r>
+          </a:p>
+        </p:txBody>
+      </p:sp>
+      <p:sp>
+        <p:nvSpPr>
+          <p:cNvPr id="8" name="TextBox 7"/>
+          <p:cNvSpPr txBox="1"/>
+          <p:nvPr/>
+        </p:nvSpPr>
+        <p:spPr>
+          <a:xfrm>
+            <a:off x="548640" y="2148840"/>
+            <a:ext cx="7406640" cy="228600"/>
+          </a:xfrm>
+          <a:prstGeom prst="rect">
+            <a:avLst/>
+          </a:prstGeom>
+          <a:noFill/>
+        </p:spPr>
+        <p:txBody>
+          <a:bodyPr wrap="square" lIns="0" rIns="0" tIns="0" bIns="0" anchor="t">
+            <a:spAutoFit/>
+          </a:bodyPr>
+          <a:lstStyle/>
+          <a:p>
+            <a:pPr algn="l"/>
+            <a:r>
+              <a:rPr sz="1050" b="1" i="0">
+                <a:solidFill>
+                  <a:srgbClr val="5B6964"/>
+                </a:solidFill>
+                <a:latin typeface="Arial"/>
+              </a:rPr>
+              <a:t>SETUP</a:t>
+            </a:r>
+          </a:p>
+        </p:txBody>
+      </p:sp>
+      <p:sp>
+        <p:nvSpPr>
+          <p:cNvPr id="9" name="TextBox 8"/>
+          <p:cNvSpPr txBox="1"/>
+          <p:nvPr/>
+        </p:nvSpPr>
+        <p:spPr>
+          <a:xfrm>
+            <a:off x="548640" y="2423160"/>
+            <a:ext cx="7406640" cy="731520"/>
+          </a:xfrm>
+          <a:prstGeom prst="rect">
+            <a:avLst/>
+          </a:prstGeom>
+          <a:noFill/>
+        </p:spPr>
+        <p:txBody>
+          <a:bodyPr wrap="square" lIns="0" rIns="0" tIns="0" bIns="0">
+            <a:spAutoFit/>
+          </a:bodyPr>
+          <a:lstStyle/>
+          <a:p>
+            <a:pPr marL="201168" indent="-201168">
+              <a:spcAft>
+                <a:spcPts val="500"/>
+              </a:spcAft>
+            </a:pPr>
+            <a:r>
+              <a:rPr sz="1350">
+                <a:solidFill>
+                  <a:srgbClr val="1E7568"/>
+                </a:solidFill>
+                <a:latin typeface="Arial"/>
+              </a:rPr>
+              <a:t>•  </a:t>
+            </a:r>
+            <a:r>
+              <a:rPr sz="1350" b="0">
+                <a:solidFill>
+                  <a:srgbClr val="18211F"/>
+                </a:solidFill>
+                <a:latin typeface="Arial"/>
+              </a:rPr>
+              <a:t>Hiring, lending, medical triage; synthetic profiles in matched sets</a:t>
+            </a:r>
+          </a:p>
+          <a:p>
+            <a:pPr marL="201168" indent="-201168">
+              <a:spcAft>
+                <a:spcPts val="500"/>
+              </a:spcAft>
+            </a:pPr>
+            <a:r>
+              <a:rPr sz="1350">
+                <a:solidFill>
+                  <a:srgbClr val="1E7568"/>
+                </a:solidFill>
+                <a:latin typeface="Arial"/>
+              </a:rPr>
+              <a:t>•  </a:t>
+            </a:r>
+            <a:r>
+              <a:rPr sz="1350" b="0">
+                <a:solidFill>
+                  <a:srgbClr val="18211F"/>
+                </a:solidFill>
+                <a:latin typeface="Arial"/>
+              </a:rPr>
+              <a:t>Only a name-coded race × gender signal varies; 4 scaffolds (direct, CoT, panel, info request)</a:t>
+            </a:r>
+          </a:p>
+        </p:txBody>
+      </p:sp>
+      <p:sp>
+        <p:nvSpPr>
+          <p:cNvPr id="10" name="TextBox 9"/>
+          <p:cNvSpPr txBox="1"/>
+          <p:nvPr/>
+        </p:nvSpPr>
+        <p:spPr>
+          <a:xfrm>
+            <a:off x="548640" y="3264408"/>
+            <a:ext cx="7406640" cy="228600"/>
+          </a:xfrm>
+          <a:prstGeom prst="rect">
+            <a:avLst/>
+          </a:prstGeom>
+          <a:noFill/>
+        </p:spPr>
+        <p:txBody>
+          <a:bodyPr wrap="square" lIns="0" rIns="0" tIns="0" bIns="0" anchor="t">
+            <a:spAutoFit/>
+          </a:bodyPr>
+          <a:lstStyle/>
+          <a:p>
+            <a:pPr algn="l"/>
+            <a:r>
+              <a:rPr sz="1050" b="1" i="0">
+                <a:solidFill>
+                  <a:srgbClr val="5B6964"/>
+                </a:solidFill>
+                <a:latin typeface="Arial"/>
+              </a:rPr>
+              <a:t>METRICS</a:t>
+            </a:r>
+          </a:p>
+        </p:txBody>
+      </p:sp>
+      <p:sp>
+        <p:nvSpPr>
+          <p:cNvPr id="11" name="TextBox 10"/>
+          <p:cNvSpPr txBox="1"/>
+          <p:nvPr/>
+        </p:nvSpPr>
+        <p:spPr>
+          <a:xfrm>
+            <a:off x="548640" y="3538728"/>
+            <a:ext cx="7406640" cy="731520"/>
+          </a:xfrm>
+          <a:prstGeom prst="rect">
+            <a:avLst/>
+          </a:prstGeom>
+          <a:noFill/>
+        </p:spPr>
+        <p:txBody>
+          <a:bodyPr wrap="square" lIns="0" rIns="0" tIns="0" bIns="0">
+            <a:spAutoFit/>
+          </a:bodyPr>
+          <a:lstStyle/>
+          <a:p>
+            <a:pPr marL="201168" indent="-201168">
+              <a:spcAft>
+                <a:spcPts val="500"/>
+              </a:spcAft>
+            </a:pPr>
+            <a:r>
+              <a:rPr sz="1350">
+                <a:solidFill>
+                  <a:srgbClr val="1E7568"/>
+                </a:solidFill>
+                <a:latin typeface="Arial"/>
+              </a:rPr>
+              <a:t>•  </a:t>
+            </a:r>
+            <a:r>
+              <a:rPr sz="1350" b="0">
+                <a:solidFill>
+                  <a:srgbClr val="18211F"/>
+                </a:solidFill>
+                <a:latin typeface="Arial"/>
+              </a:rPr>
+              <a:t>Flip rate, score spread, action-rate gap, info-request gap</a:t>
+            </a:r>
+          </a:p>
+          <a:p>
+            <a:pPr marL="201168" indent="-201168">
+              <a:spcAft>
+                <a:spcPts val="500"/>
+              </a:spcAft>
+            </a:pPr>
+            <a:r>
+              <a:rPr sz="1350">
+                <a:solidFill>
+                  <a:srgbClr val="1E7568"/>
+                </a:solidFill>
+                <a:latin typeface="Arial"/>
+              </a:rPr>
+              <a:t>•  </a:t>
+            </a:r>
+            <a:r>
+              <a:rPr sz="1350" b="0">
+                <a:solidFill>
+                  <a:srgbClr val="18211F"/>
+                </a:solidFill>
+                <a:latin typeface="Arial"/>
+              </a:rPr>
+              <a:t>Bootstrap CIs, permutation tests, false-discovery-rate control; test–retest reruns</a:t>
+            </a:r>
+          </a:p>
+        </p:txBody>
+      </p:sp>
+      <p:sp>
+        <p:nvSpPr>
+          <p:cNvPr id="12" name="TextBox 11"/>
+          <p:cNvSpPr txBox="1"/>
+          <p:nvPr/>
+        </p:nvSpPr>
+        <p:spPr>
+          <a:xfrm>
+            <a:off x="548640" y="4379976"/>
+            <a:ext cx="7406640" cy="228600"/>
+          </a:xfrm>
+          <a:prstGeom prst="rect">
+            <a:avLst/>
+          </a:prstGeom>
+          <a:noFill/>
+        </p:spPr>
+        <p:txBody>
+          <a:bodyPr wrap="square" lIns="0" rIns="0" tIns="0" bIns="0" anchor="t">
+            <a:spAutoFit/>
+          </a:bodyPr>
+          <a:lstStyle/>
+          <a:p>
+            <a:pPr algn="l"/>
+            <a:r>
+              <a:rPr sz="1050" b="1" i="0">
+                <a:solidFill>
+                  <a:srgbClr val="5B6964"/>
+                </a:solidFill>
+                <a:latin typeface="Arial"/>
+              </a:rPr>
+              <a:t>FINDINGS</a:t>
+            </a:r>
+          </a:p>
+        </p:txBody>
+      </p:sp>
+      <p:sp>
+        <p:nvSpPr>
+          <p:cNvPr id="13" name="TextBox 12"/>
+          <p:cNvSpPr txBox="1"/>
+          <p:nvPr/>
+        </p:nvSpPr>
+        <p:spPr>
+          <a:xfrm>
+            <a:off x="548640" y="4654296"/>
+            <a:ext cx="7406640" cy="1188720"/>
+          </a:xfrm>
+          <a:prstGeom prst="rect">
+            <a:avLst/>
+          </a:prstGeom>
+          <a:noFill/>
+        </p:spPr>
+        <p:txBody>
+          <a:bodyPr wrap="square" lIns="0" rIns="0" tIns="0" bIns="0">
+            <a:spAutoFit/>
+          </a:bodyPr>
+          <a:lstStyle/>
+          <a:p>
+            <a:pPr marL="201168" indent="-201168">
+              <a:spcAft>
+                <a:spcPts val="500"/>
+              </a:spcAft>
+            </a:pPr>
+            <a:r>
+              <a:rPr sz="1350">
+                <a:solidFill>
+                  <a:srgbClr val="1E7568"/>
+                </a:solidFill>
+                <a:latin typeface="Arial"/>
+              </a:rPr>
+              <a:t>•  </a:t>
+            </a:r>
+            <a:r>
+              <a:rPr sz="1350" b="0">
+                <a:solidFill>
+                  <a:srgbClr val="18211F"/>
+                </a:solidFill>
+                <a:latin typeface="Arial"/>
+              </a:rPr>
+              <a:t>A six-group range vs. a two-run noise gap overstates disparity ≈2.25× by arity alone</a:t>
+            </a:r>
+          </a:p>
+          <a:p>
+            <a:pPr marL="201168" indent="-201168">
+              <a:spcAft>
+                <a:spcPts val="500"/>
+              </a:spcAft>
+            </a:pPr>
+            <a:r>
+              <a:rPr sz="1350">
+                <a:solidFill>
+                  <a:srgbClr val="1E7568"/>
+                </a:solidFill>
+                <a:latin typeface="Arial"/>
+              </a:rPr>
+              <a:t>•  </a:t>
+            </a:r>
+            <a:r>
+              <a:rPr sz="1350" b="0">
+                <a:solidFill>
+                  <a:srgbClr val="18211F"/>
+                </a:solidFill>
+                <a:latin typeface="Arial"/>
+              </a:rPr>
+              <a:t>Against an arity-matched floor: 0/120 pairwise, 0/9 omnibus contrasts for Claude Haiku 4.5</a:t>
+            </a:r>
+          </a:p>
+          <a:p>
+            <a:pPr marL="201168" indent="-201168">
+              <a:spcAft>
+                <a:spcPts val="500"/>
+              </a:spcAft>
+            </a:pPr>
+            <a:r>
+              <a:rPr sz="1350">
+                <a:solidFill>
+                  <a:srgbClr val="1E7568"/>
+                </a:solidFill>
+                <a:latin typeface="Arial"/>
+              </a:rPr>
+              <a:t>•  </a:t>
+            </a:r>
+            <a:r>
+              <a:rPr sz="1350" b="0">
+                <a:solidFill>
+                  <a:srgbClr val="18211F"/>
+                </a:solidFill>
+                <a:latin typeface="Arial"/>
+              </a:rPr>
+              <a:t>A planted-bias test confirms detection (construction barely described)</a:t>
+            </a:r>
+          </a:p>
+        </p:txBody>
+      </p:sp>
+      <p:sp>
+        <p:nvSpPr>
+          <p:cNvPr id="14" name="Rectangle 13"/>
+          <p:cNvSpPr/>
+          <p:nvPr/>
+        </p:nvSpPr>
+        <p:spPr>
+          <a:xfrm>
+            <a:off x="8321040" y="1536192"/>
+            <a:ext cx="3319272" cy="4709160"/>
+          </a:xfrm>
+          <a:prstGeom prst="rect">
+            <a:avLst/>
+          </a:prstGeom>
+          <a:solidFill>
+            <a:srgbClr val="E3F0ED"/>
+          </a:solidFill>
+          <a:ln>
+            <a:noFill/>
+          </a:ln>
+          <a:effectLst/>
+        </p:spPr>
+        <p:style>
+          <a:lnRef idx="1">
+            <a:schemeClr val="accent1"/>
+          </a:lnRef>
+          <a:fillRef idx="3">
+            <a:schemeClr val="accent1"/>
+          </a:fillRef>
+          <a:effectRef idx="2">
+            <a:schemeClr val="accent1"/>
+          </a:effectRef>
+          <a:fontRef idx="minor">
+            <a:schemeClr val="lt1"/>
+          </a:fontRef>
+        </p:style>
+        <p:txBody>
+          <a:bodyPr rtlCol="0" anchor="ctr"/>
+          <a:lstStyle/>
+          <a:p>
+            <a:pPr algn="ctr"/>
+          </a:p>
+        </p:txBody>
+      </p:sp>
+      <p:sp>
+        <p:nvSpPr>
+          <p:cNvPr id="15" name="TextBox 14"/>
+          <p:cNvSpPr txBox="1"/>
+          <p:nvPr/>
+        </p:nvSpPr>
+        <p:spPr>
+          <a:xfrm>
+            <a:off x="8549640" y="1737360"/>
+            <a:ext cx="2880360" cy="457200"/>
+          </a:xfrm>
+          <a:prstGeom prst="rect">
+            <a:avLst/>
+          </a:prstGeom>
+          <a:noFill/>
+        </p:spPr>
+        <p:txBody>
+          <a:bodyPr wrap="square" lIns="0" rIns="0" tIns="0" bIns="0" anchor="t">
+            <a:spAutoFit/>
+          </a:bodyPr>
+          <a:lstStyle/>
+          <a:p>
+            <a:pPr algn="l"/>
+            <a:r>
+              <a:rPr sz="1050" b="1" i="0">
+                <a:solidFill>
+                  <a:srgbClr val="1E7568"/>
+                </a:solidFill>
+                <a:latin typeface="Arial"/>
+              </a:rPr>
+              <a:t>HOW THEY EVALUATE</a:t>
+            </a:r>
+          </a:p>
+        </p:txBody>
+      </p:sp>
+      <p:sp>
+        <p:nvSpPr>
+          <p:cNvPr id="16" name="TextBox 15"/>
+          <p:cNvSpPr txBox="1"/>
+          <p:nvPr/>
+        </p:nvSpPr>
+        <p:spPr>
+          <a:xfrm>
+            <a:off x="8549640" y="2103120"/>
+            <a:ext cx="2880360" cy="4023360"/>
+          </a:xfrm>
+          <a:prstGeom prst="rect">
+            <a:avLst/>
+          </a:prstGeom>
+          <a:noFill/>
+        </p:spPr>
+        <p:txBody>
           <a:bodyPr wrap="square" lIns="0" rIns="0" tIns="0" bIns="0">
             <a:spAutoFit/>
           </a:bodyPr>
@@ -8221,12 +8434,16 @@
               <a:spcAft>
                 <a:spcPts val="800"/>
               </a:spcAft>
-              <a:buClr>
-                <a:srgbClr val="1E7568"/>
-              </a:buClr>
-              <a:buFont typeface="Arial"/>
-              <a:buChar char="•"/>
             </a:pPr>
+            <a:r>
+              <a:rPr sz="1300">
+                <a:solidFill>
+                  <a:srgbClr val="1E7568"/>
+                </a:solidFill>
+                <a:latin typeface="Arial"/>
+              </a:rPr>
+              <a:t>•  </a:t>
+            </a:r>
             <a:r>
               <a:rPr sz="1300" b="0">
                 <a:solidFill>
@@ -8242,12 +8459,16 @@
               <a:spcAft>
                 <a:spcPts val="800"/>
               </a:spcAft>
-              <a:buClr>
-                <a:srgbClr val="1E7568"/>
-              </a:buClr>
-              <a:buFont typeface="Arial"/>
-              <a:buChar char="•"/>
             </a:pPr>
+            <a:r>
+              <a:rPr sz="1300">
+                <a:solidFill>
+                  <a:srgbClr val="1E7568"/>
+                </a:solidFill>
+                <a:latin typeface="Arial"/>
+              </a:rPr>
+              <a:t>•  </a:t>
+            </a:r>
             <a:r>
               <a:rPr sz="1300" b="0">
                 <a:solidFill>
@@ -8263,12 +8484,16 @@
               <a:spcAft>
                 <a:spcPts val="800"/>
               </a:spcAft>
-              <a:buClr>
-                <a:srgbClr val="1E7568"/>
-              </a:buClr>
-              <a:buFont typeface="Arial"/>
-              <a:buChar char="•"/>
             </a:pPr>
+            <a:r>
+              <a:rPr sz="1300">
+                <a:solidFill>
+                  <a:srgbClr val="1E7568"/>
+                </a:solidFill>
+                <a:latin typeface="Arial"/>
+              </a:rPr>
+              <a:t>•  </a:t>
+            </a:r>
             <a:r>
               <a:rPr sz="1300" b="0">
                 <a:solidFill>
@@ -8284,12 +8509,16 @@
               <a:spcAft>
                 <a:spcPts val="800"/>
               </a:spcAft>
-              <a:buClr>
-                <a:srgbClr val="1E7568"/>
-              </a:buClr>
-              <a:buFont typeface="Arial"/>
-              <a:buChar char="•"/>
             </a:pPr>
+            <a:r>
+              <a:rPr sz="1300">
+                <a:solidFill>
+                  <a:srgbClr val="1E7568"/>
+                </a:solidFill>
+                <a:latin typeface="Arial"/>
+              </a:rPr>
+              <a:t>•  </a:t>
+            </a:r>
             <a:r>
               <a:rPr sz="1300" b="1">
                 <a:solidFill>
@@ -8407,492 +8636,22 @@
           </a:p>
         </p:txBody>
       </p:sp>
-      <p:cxnSp>
-        <p:nvCxnSpPr>
-          <p:cNvPr id="4" name="Connector 3"/>
-          <p:cNvCxnSpPr/>
-          <p:nvPr/>
-        </p:nvCxnSpPr>
-        <p:spPr>
-          <a:xfrm>
-            <a:off x="548640" y="1325880"/>
-            <a:ext cx="11091672" cy="0"/>
-          </a:xfrm>
-          <a:prstGeom prst="line">
-            <a:avLst/>
-          </a:prstGeom>
-          <a:ln w="9525">
-            <a:solidFill>
-              <a:srgbClr val="C6D0CC"/>
-            </a:solidFill>
-          </a:ln>
-        </p:spPr>
-        <p:style>
-          <a:lnRef idx="2">
-            <a:schemeClr val="accent1"/>
-          </a:lnRef>
-          <a:fillRef idx="0">
-            <a:schemeClr val="accent1"/>
-          </a:fillRef>
-          <a:effectRef idx="1">
-            <a:schemeClr val="accent1"/>
-          </a:effectRef>
-          <a:fontRef idx="minor">
-            <a:schemeClr val="tx1"/>
-          </a:fontRef>
-        </p:style>
-      </p:cxnSp>
-      <p:sp>
-        <p:nvSpPr>
-          <p:cNvPr id="5" name="TextBox 4"/>
-          <p:cNvSpPr txBox="1"/>
-          <p:nvPr/>
-        </p:nvSpPr>
-        <p:spPr>
-          <a:xfrm>
-            <a:off x="10881360" y="6446520"/>
-            <a:ext cx="758952" cy="228600"/>
-          </a:xfrm>
-          <a:prstGeom prst="rect">
-            <a:avLst/>
-          </a:prstGeom>
-          <a:noFill/>
-        </p:spPr>
-        <p:txBody>
-          <a:bodyPr wrap="square" lIns="0" rIns="0" tIns="0" bIns="0" anchor="t">
-            <a:spAutoFit/>
-          </a:bodyPr>
-          <a:lstStyle/>
-          <a:p>
-            <a:pPr algn="r"/>
-            <a:r>
-              <a:rPr sz="1000" b="0" i="0">
-                <a:solidFill>
-                  <a:srgbClr val="5B6964"/>
-                </a:solidFill>
-                <a:latin typeface="Arial"/>
-              </a:rPr>
-              <a:t>7</a:t>
-            </a:r>
-          </a:p>
-        </p:txBody>
-      </p:sp>
-      <p:sp>
-        <p:nvSpPr>
-          <p:cNvPr id="6" name="TextBox 5"/>
-          <p:cNvSpPr txBox="1"/>
-          <p:nvPr/>
-        </p:nvSpPr>
-        <p:spPr>
-          <a:xfrm>
-            <a:off x="548640" y="6446520"/>
-            <a:ext cx="7315200" cy="228600"/>
-          </a:xfrm>
-          <a:prstGeom prst="rect">
-            <a:avLst/>
-          </a:prstGeom>
-          <a:noFill/>
-        </p:spPr>
-        <p:txBody>
-          <a:bodyPr wrap="square" lIns="0" rIns="0" tIns="0" bIns="0" anchor="t">
-            <a:spAutoFit/>
-          </a:bodyPr>
-          <a:lstStyle/>
-          <a:p>
-            <a:pPr algn="l"/>
-            <a:r>
-              <a:rPr sz="1000" b="0" i="0">
-                <a:solidFill>
-                  <a:srgbClr val="5B6964"/>
-                </a:solidFill>
-                <a:latin typeface="Arial"/>
-              </a:rPr>
-              <a:t>Related work for FAIR-TRACE / SCAFF · 2026-09-11</a:t>
-            </a:r>
-          </a:p>
-        </p:txBody>
-      </p:sp>
-      <p:sp>
-        <p:nvSpPr>
-          <p:cNvPr id="7" name="TextBox 6"/>
-          <p:cNvSpPr txBox="1"/>
-          <p:nvPr/>
-        </p:nvSpPr>
-        <p:spPr>
-          <a:xfrm>
-            <a:off x="548640" y="1536192"/>
-            <a:ext cx="7406640" cy="457200"/>
-          </a:xfrm>
-          <a:prstGeom prst="rect">
-            <a:avLst/>
-          </a:prstGeom>
-          <a:noFill/>
-        </p:spPr>
-        <p:txBody>
-          <a:bodyPr wrap="square" lIns="0" rIns="0" tIns="0" bIns="0" anchor="t">
-            <a:spAutoFit/>
-          </a:bodyPr>
-          <a:lstStyle/>
-          <a:p>
-            <a:pPr algn="l"/>
-            <a:r>
-              <a:rPr sz="1500" b="1" i="0">
-                <a:solidFill>
-                  <a:srgbClr val="1E7568"/>
-                </a:solidFill>
-                <a:latin typeface="Arial"/>
-              </a:rPr>
-              <a:t>Question  </a:t>
-            </a:r>
-            <a:r>
-              <a:rPr sz="1500" b="0" i="0">
-                <a:solidFill>
-                  <a:srgbClr val="18211F"/>
-                </a:solidFill>
-                <a:latin typeface="Arial"/>
-              </a:rPr>
-              <a:t>What does a counterfactual flip rate mean if the agent flips on identical input?</a:t>
-            </a:r>
-          </a:p>
-        </p:txBody>
-      </p:sp>
-      <p:sp>
-        <p:nvSpPr>
-          <p:cNvPr id="8" name="TextBox 7"/>
-          <p:cNvSpPr txBox="1"/>
-          <p:nvPr/>
-        </p:nvSpPr>
-        <p:spPr>
-          <a:xfrm>
-            <a:off x="548640" y="2148840"/>
-            <a:ext cx="7406640" cy="228600"/>
-          </a:xfrm>
-          <a:prstGeom prst="rect">
-            <a:avLst/>
-          </a:prstGeom>
-          <a:noFill/>
-        </p:spPr>
-        <p:txBody>
-          <a:bodyPr wrap="square" lIns="0" rIns="0" tIns="0" bIns="0" anchor="t">
-            <a:spAutoFit/>
-          </a:bodyPr>
-          <a:lstStyle/>
-          <a:p>
-            <a:pPr algn="l"/>
-            <a:r>
-              <a:rPr sz="1050" b="1" i="0">
-                <a:solidFill>
-                  <a:srgbClr val="5B6964"/>
-                </a:solidFill>
-                <a:latin typeface="Arial"/>
-              </a:rPr>
-              <a:t>SETUP</a:t>
-            </a:r>
-          </a:p>
-        </p:txBody>
-      </p:sp>
-      <p:sp>
-        <p:nvSpPr>
-          <p:cNvPr id="9" name="TextBox 8"/>
-          <p:cNvSpPr txBox="1"/>
-          <p:nvPr/>
-        </p:nvSpPr>
-        <p:spPr>
-          <a:xfrm>
-            <a:off x="548640" y="2423160"/>
-            <a:ext cx="7406640" cy="731520"/>
-          </a:xfrm>
-          <a:prstGeom prst="rect">
-            <a:avLst/>
-          </a:prstGeom>
-          <a:noFill/>
-        </p:spPr>
-        <p:txBody>
-          <a:bodyPr wrap="square" lIns="0" rIns="0" tIns="0" bIns="0">
-            <a:spAutoFit/>
-          </a:bodyPr>
-          <a:lstStyle/>
-          <a:p>
-            <a:pPr marL="201168" indent="-201168">
-              <a:spcAft>
-                <a:spcPts val="500"/>
-              </a:spcAft>
-              <a:buClr>
-                <a:srgbClr val="1E7568"/>
-              </a:buClr>
-              <a:buFont typeface="Arial"/>
-              <a:buChar char="•"/>
-            </a:pPr>
-            <a:r>
-              <a:rPr sz="1350" b="0">
-                <a:solidFill>
-                  <a:srgbClr val="18211F"/>
-                </a:solidFill>
-                <a:latin typeface="Arial"/>
-              </a:rPr>
-              <a:t>FairMedAgent: synthetic clinical vignettes, six-stage trajectory (five model decisions)</a:t>
-            </a:r>
-          </a:p>
-          <a:p>
-            <a:pPr marL="201168" indent="-201168">
-              <a:spcAft>
-                <a:spcPts val="500"/>
-              </a:spcAft>
-              <a:buClr>
-                <a:srgbClr val="1E7568"/>
-              </a:buClr>
-              <a:buFont typeface="Arial"/>
-              <a:buChar char="•"/>
-            </a:pPr>
-            <a:r>
-              <a:rPr sz="1350" b="0">
-                <a:solidFill>
-                  <a:srgbClr val="18211F"/>
-                </a:solidFill>
-                <a:latin typeface="Arial"/>
-              </a:rPr>
-              <a:t>Descriptors: race, sex, age, insurance, English proficiency, and intersections</a:t>
-            </a:r>
-          </a:p>
-        </p:txBody>
-      </p:sp>
-      <p:sp>
-        <p:nvSpPr>
-          <p:cNvPr id="10" name="TextBox 9"/>
-          <p:cNvSpPr txBox="1"/>
-          <p:nvPr/>
-        </p:nvSpPr>
-        <p:spPr>
-          <a:xfrm>
-            <a:off x="548640" y="3264408"/>
-            <a:ext cx="7406640" cy="228600"/>
-          </a:xfrm>
-          <a:prstGeom prst="rect">
-            <a:avLst/>
-          </a:prstGeom>
-          <a:noFill/>
-        </p:spPr>
-        <p:txBody>
-          <a:bodyPr wrap="square" lIns="0" rIns="0" tIns="0" bIns="0" anchor="t">
-            <a:spAutoFit/>
-          </a:bodyPr>
-          <a:lstStyle/>
-          <a:p>
-            <a:pPr algn="l"/>
-            <a:r>
-              <a:rPr sz="1050" b="1" i="0">
-                <a:solidFill>
-                  <a:srgbClr val="5B6964"/>
-                </a:solidFill>
-                <a:latin typeface="Arial"/>
-              </a:rPr>
-              <a:t>FLOOR PROTOCOL</a:t>
-            </a:r>
-          </a:p>
-        </p:txBody>
-      </p:sp>
-      <p:sp>
-        <p:nvSpPr>
-          <p:cNvPr id="11" name="TextBox 10"/>
-          <p:cNvSpPr txBox="1"/>
-          <p:nvPr/>
-        </p:nvSpPr>
-        <p:spPr>
-          <a:xfrm>
-            <a:off x="548640" y="3538728"/>
-            <a:ext cx="7406640" cy="731520"/>
-          </a:xfrm>
-          <a:prstGeom prst="rect">
-            <a:avLst/>
-          </a:prstGeom>
-          <a:noFill/>
-        </p:spPr>
-        <p:txBody>
-          <a:bodyPr wrap="square" lIns="0" rIns="0" tIns="0" bIns="0">
-            <a:spAutoFit/>
-          </a:bodyPr>
-          <a:lstStyle/>
-          <a:p>
-            <a:pPr marL="201168" indent="-201168">
-              <a:spcAft>
-                <a:spcPts val="500"/>
-              </a:spcAft>
-              <a:buClr>
-                <a:srgbClr val="1E7568"/>
-              </a:buClr>
-              <a:buFont typeface="Arial"/>
-              <a:buChar char="•"/>
-            </a:pPr>
-            <a:r>
-              <a:rPr sz="1350" b="0">
-                <a:solidFill>
-                  <a:srgbClr val="18211F"/>
-                </a:solidFill>
-                <a:latin typeface="Arial"/>
-              </a:rPr>
-              <a:t>Rerun an identical condition 10× over 16 vignettes; count action changes per cell</a:t>
-            </a:r>
-          </a:p>
-          <a:p>
-            <a:pPr marL="201168" indent="-201168">
-              <a:spcAft>
-                <a:spcPts val="500"/>
-              </a:spcAft>
-              <a:buClr>
-                <a:srgbClr val="1E7568"/>
-              </a:buClr>
-              <a:buFont typeface="Arial"/>
-              <a:buChar char="•"/>
-            </a:pPr>
-            <a:r>
-              <a:rPr sz="1350" b="0">
-                <a:solidFill>
-                  <a:srgbClr val="18211F"/>
-                </a:solidFill>
-                <a:latin typeface="Arial"/>
-              </a:rPr>
-              <a:t>Repeat on a second model; test majority vote over 5 draws</a:t>
-            </a:r>
-          </a:p>
-        </p:txBody>
-      </p:sp>
-      <p:sp>
-        <p:nvSpPr>
-          <p:cNvPr id="12" name="TextBox 11"/>
-          <p:cNvSpPr txBox="1"/>
-          <p:nvPr/>
-        </p:nvSpPr>
-        <p:spPr>
-          <a:xfrm>
-            <a:off x="548640" y="4379976"/>
-            <a:ext cx="7406640" cy="228600"/>
-          </a:xfrm>
-          <a:prstGeom prst="rect">
-            <a:avLst/>
-          </a:prstGeom>
-          <a:noFill/>
-        </p:spPr>
-        <p:txBody>
-          <a:bodyPr wrap="square" lIns="0" rIns="0" tIns="0" bIns="0" anchor="t">
-            <a:spAutoFit/>
-          </a:bodyPr>
-          <a:lstStyle/>
-          <a:p>
-            <a:pPr algn="l"/>
-            <a:r>
-              <a:rPr sz="1050" b="1" i="0">
-                <a:solidFill>
-                  <a:srgbClr val="5B6964"/>
-                </a:solidFill>
-                <a:latin typeface="Arial"/>
-              </a:rPr>
-              <a:t>FINDINGS</a:t>
-            </a:r>
-          </a:p>
-        </p:txBody>
-      </p:sp>
-      <p:sp>
-        <p:nvSpPr>
-          <p:cNvPr id="13" name="TextBox 12"/>
-          <p:cNvSpPr txBox="1"/>
-          <p:nvPr/>
-        </p:nvSpPr>
-        <p:spPr>
-          <a:xfrm>
-            <a:off x="548640" y="4654296"/>
-            <a:ext cx="7406640" cy="1188720"/>
-          </a:xfrm>
-          <a:prstGeom prst="rect">
-            <a:avLst/>
-          </a:prstGeom>
-          <a:noFill/>
-        </p:spPr>
-        <p:txBody>
-          <a:bodyPr wrap="square" lIns="0" rIns="0" tIns="0" bIns="0">
-            <a:spAutoFit/>
-          </a:bodyPr>
-          <a:lstStyle/>
-          <a:p>
-            <a:pPr marL="201168" indent="-201168">
-              <a:spcAft>
-                <a:spcPts val="500"/>
-              </a:spcAft>
-              <a:buClr>
-                <a:srgbClr val="1E7568"/>
-              </a:buClr>
-              <a:buFont typeface="Arial"/>
-              <a:buChar char="•"/>
-            </a:pPr>
-            <a:r>
-              <a:rPr sz="1350" b="0">
-                <a:solidFill>
-                  <a:srgbClr val="18211F"/>
-                </a:solidFill>
-                <a:latin typeface="Arial"/>
-              </a:rPr>
-              <a:t>8.7% of actions change with nothing varied; 0.022 (ICU escalation) to 0.179 (substance caution)</a:t>
-            </a:r>
-          </a:p>
-          <a:p>
-            <a:pPr marL="201168" indent="-201168">
-              <a:spcAft>
-                <a:spcPts val="500"/>
-              </a:spcAft>
-              <a:buClr>
-                <a:srgbClr val="1E7568"/>
-              </a:buClr>
-              <a:buFont typeface="Arial"/>
-              <a:buChar char="•"/>
-            </a:pPr>
-            <a:r>
-              <a:rPr sz="1350" b="0">
-                <a:solidFill>
-                  <a:srgbClr val="18211F"/>
-                </a:solidFill>
-                <a:latin typeface="Arial"/>
-              </a:rPr>
-              <a:t>Second model: 6.7% floor, same ranking of actions (Spearman 0.94)</a:t>
-            </a:r>
-          </a:p>
-          <a:p>
-            <a:pPr marL="201168" indent="-201168">
-              <a:spcAft>
-                <a:spcPts val="500"/>
-              </a:spcAft>
-              <a:buClr>
-                <a:srgbClr val="1E7568"/>
-              </a:buClr>
-              <a:buFont typeface="Arial"/>
-              <a:buChar char="•"/>
-            </a:pPr>
-            <a:r>
-              <a:rPr sz="1350" b="0">
-                <a:solidFill>
-                  <a:srgbClr val="18211F"/>
-                </a:solidFill>
-                <a:latin typeface="Arial"/>
-              </a:rPr>
-              <a:t>Majority vote removes 39% of the floor, then flattens; no disparity beats the floor</a:t>
-            </a:r>
-          </a:p>
-        </p:txBody>
-      </p:sp>
-      <p:sp>
-        <p:nvSpPr>
-          <p:cNvPr id="14" name="Rectangle 13"/>
+      <p:sp>
+        <p:nvSpPr>
+          <p:cNvPr id="4" name="Rectangle 3"/>
           <p:cNvSpPr/>
           <p:nvPr/>
         </p:nvSpPr>
         <p:spPr>
           <a:xfrm>
-            <a:off x="8321040" y="1536192"/>
-            <a:ext cx="3319272" cy="4709160"/>
+            <a:off x="548640" y="1325880"/>
+            <a:ext cx="11091672" cy="10972"/>
           </a:xfrm>
           <a:prstGeom prst="rect">
             <a:avLst/>
           </a:prstGeom>
           <a:solidFill>
-            <a:srgbClr val="E3F0ED"/>
+            <a:srgbClr val="C6D0CC"/>
           </a:solidFill>
           <a:ln>
             <a:noFill/>
@@ -8923,14 +8682,14 @@
       </p:sp>
       <p:sp>
         <p:nvSpPr>
-          <p:cNvPr id="15" name="TextBox 14"/>
+          <p:cNvPr id="5" name="TextBox 4"/>
           <p:cNvSpPr txBox="1"/>
           <p:nvPr/>
         </p:nvSpPr>
         <p:spPr>
           <a:xfrm>
-            <a:off x="8549640" y="1737360"/>
-            <a:ext cx="2880360" cy="457200"/>
+            <a:off x="10881360" y="6446520"/>
+            <a:ext cx="758952" cy="228600"/>
           </a:xfrm>
           <a:prstGeom prst="rect">
             <a:avLst/>
@@ -8943,29 +8702,29 @@
           </a:bodyPr>
           <a:lstStyle/>
           <a:p>
-            <a:pPr algn="l"/>
-            <a:r>
-              <a:rPr sz="1050" b="1" i="0">
-                <a:solidFill>
-                  <a:srgbClr val="1E7568"/>
-                </a:solidFill>
-                <a:latin typeface="Arial"/>
-              </a:rPr>
-              <a:t>HOW THEY EVALUATE</a:t>
-            </a:r>
-          </a:p>
-        </p:txBody>
-      </p:sp>
-      <p:sp>
-        <p:nvSpPr>
-          <p:cNvPr id="16" name="TextBox 15"/>
+            <a:pPr algn="r"/>
+            <a:r>
+              <a:rPr sz="1000" b="0" i="0">
+                <a:solidFill>
+                  <a:srgbClr val="5B6964"/>
+                </a:solidFill>
+                <a:latin typeface="Arial"/>
+              </a:rPr>
+              <a:t>7</a:t>
+            </a:r>
+          </a:p>
+        </p:txBody>
+      </p:sp>
+      <p:sp>
+        <p:nvSpPr>
+          <p:cNvPr id="6" name="TextBox 5"/>
           <p:cNvSpPr txBox="1"/>
           <p:nvPr/>
         </p:nvSpPr>
         <p:spPr>
           <a:xfrm>
-            <a:off x="8549640" y="2103120"/>
-            <a:ext cx="2880360" cy="4023360"/>
+            <a:off x="548640" y="6446520"/>
+            <a:ext cx="7315200" cy="228600"/>
           </a:xfrm>
           <a:prstGeom prst="rect">
             <a:avLst/>
@@ -8973,6 +8732,513 @@
           <a:noFill/>
         </p:spPr>
         <p:txBody>
+          <a:bodyPr wrap="square" lIns="0" rIns="0" tIns="0" bIns="0" anchor="t">
+            <a:spAutoFit/>
+          </a:bodyPr>
+          <a:lstStyle/>
+          <a:p>
+            <a:pPr algn="l"/>
+            <a:r>
+              <a:rPr sz="1000" b="0" i="0">
+                <a:solidFill>
+                  <a:srgbClr val="5B6964"/>
+                </a:solidFill>
+                <a:latin typeface="Arial"/>
+              </a:rPr>
+              <a:t>Related work for FAIR-TRACE / SCAFF · 2026-09-11</a:t>
+            </a:r>
+          </a:p>
+        </p:txBody>
+      </p:sp>
+      <p:sp>
+        <p:nvSpPr>
+          <p:cNvPr id="7" name="TextBox 6"/>
+          <p:cNvSpPr txBox="1"/>
+          <p:nvPr/>
+        </p:nvSpPr>
+        <p:spPr>
+          <a:xfrm>
+            <a:off x="548640" y="1536192"/>
+            <a:ext cx="7406640" cy="457200"/>
+          </a:xfrm>
+          <a:prstGeom prst="rect">
+            <a:avLst/>
+          </a:prstGeom>
+          <a:noFill/>
+        </p:spPr>
+        <p:txBody>
+          <a:bodyPr wrap="square" lIns="0" rIns="0" tIns="0" bIns="0" anchor="t">
+            <a:spAutoFit/>
+          </a:bodyPr>
+          <a:lstStyle/>
+          <a:p>
+            <a:pPr algn="l"/>
+            <a:r>
+              <a:rPr sz="1500" b="1" i="0">
+                <a:solidFill>
+                  <a:srgbClr val="1E7568"/>
+                </a:solidFill>
+                <a:latin typeface="Arial"/>
+              </a:rPr>
+              <a:t>Question  </a:t>
+            </a:r>
+            <a:r>
+              <a:rPr sz="1500" b="0" i="0">
+                <a:solidFill>
+                  <a:srgbClr val="18211F"/>
+                </a:solidFill>
+                <a:latin typeface="Arial"/>
+              </a:rPr>
+              <a:t>What does a counterfactual flip rate mean if the agent flips on identical input?</a:t>
+            </a:r>
+          </a:p>
+        </p:txBody>
+      </p:sp>
+      <p:sp>
+        <p:nvSpPr>
+          <p:cNvPr id="8" name="TextBox 7"/>
+          <p:cNvSpPr txBox="1"/>
+          <p:nvPr/>
+        </p:nvSpPr>
+        <p:spPr>
+          <a:xfrm>
+            <a:off x="548640" y="2148840"/>
+            <a:ext cx="7406640" cy="228600"/>
+          </a:xfrm>
+          <a:prstGeom prst="rect">
+            <a:avLst/>
+          </a:prstGeom>
+          <a:noFill/>
+        </p:spPr>
+        <p:txBody>
+          <a:bodyPr wrap="square" lIns="0" rIns="0" tIns="0" bIns="0" anchor="t">
+            <a:spAutoFit/>
+          </a:bodyPr>
+          <a:lstStyle/>
+          <a:p>
+            <a:pPr algn="l"/>
+            <a:r>
+              <a:rPr sz="1050" b="1" i="0">
+                <a:solidFill>
+                  <a:srgbClr val="5B6964"/>
+                </a:solidFill>
+                <a:latin typeface="Arial"/>
+              </a:rPr>
+              <a:t>SETUP</a:t>
+            </a:r>
+          </a:p>
+        </p:txBody>
+      </p:sp>
+      <p:sp>
+        <p:nvSpPr>
+          <p:cNvPr id="9" name="TextBox 8"/>
+          <p:cNvSpPr txBox="1"/>
+          <p:nvPr/>
+        </p:nvSpPr>
+        <p:spPr>
+          <a:xfrm>
+            <a:off x="548640" y="2423160"/>
+            <a:ext cx="7406640" cy="731520"/>
+          </a:xfrm>
+          <a:prstGeom prst="rect">
+            <a:avLst/>
+          </a:prstGeom>
+          <a:noFill/>
+        </p:spPr>
+        <p:txBody>
+          <a:bodyPr wrap="square" lIns="0" rIns="0" tIns="0" bIns="0">
+            <a:spAutoFit/>
+          </a:bodyPr>
+          <a:lstStyle/>
+          <a:p>
+            <a:pPr marL="201168" indent="-201168">
+              <a:spcAft>
+                <a:spcPts val="500"/>
+              </a:spcAft>
+            </a:pPr>
+            <a:r>
+              <a:rPr sz="1350">
+                <a:solidFill>
+                  <a:srgbClr val="1E7568"/>
+                </a:solidFill>
+                <a:latin typeface="Arial"/>
+              </a:rPr>
+              <a:t>•  </a:t>
+            </a:r>
+            <a:r>
+              <a:rPr sz="1350" b="0">
+                <a:solidFill>
+                  <a:srgbClr val="18211F"/>
+                </a:solidFill>
+                <a:latin typeface="Arial"/>
+              </a:rPr>
+              <a:t>FairMedAgent: synthetic clinical vignettes, six-stage trajectory (five model decisions)</a:t>
+            </a:r>
+          </a:p>
+          <a:p>
+            <a:pPr marL="201168" indent="-201168">
+              <a:spcAft>
+                <a:spcPts val="500"/>
+              </a:spcAft>
+            </a:pPr>
+            <a:r>
+              <a:rPr sz="1350">
+                <a:solidFill>
+                  <a:srgbClr val="1E7568"/>
+                </a:solidFill>
+                <a:latin typeface="Arial"/>
+              </a:rPr>
+              <a:t>•  </a:t>
+            </a:r>
+            <a:r>
+              <a:rPr sz="1350" b="0">
+                <a:solidFill>
+                  <a:srgbClr val="18211F"/>
+                </a:solidFill>
+                <a:latin typeface="Arial"/>
+              </a:rPr>
+              <a:t>Descriptors: race, sex, age, insurance, English proficiency, and intersections</a:t>
+            </a:r>
+          </a:p>
+        </p:txBody>
+      </p:sp>
+      <p:sp>
+        <p:nvSpPr>
+          <p:cNvPr id="10" name="TextBox 9"/>
+          <p:cNvSpPr txBox="1"/>
+          <p:nvPr/>
+        </p:nvSpPr>
+        <p:spPr>
+          <a:xfrm>
+            <a:off x="548640" y="3264408"/>
+            <a:ext cx="7406640" cy="228600"/>
+          </a:xfrm>
+          <a:prstGeom prst="rect">
+            <a:avLst/>
+          </a:prstGeom>
+          <a:noFill/>
+        </p:spPr>
+        <p:txBody>
+          <a:bodyPr wrap="square" lIns="0" rIns="0" tIns="0" bIns="0" anchor="t">
+            <a:spAutoFit/>
+          </a:bodyPr>
+          <a:lstStyle/>
+          <a:p>
+            <a:pPr algn="l"/>
+            <a:r>
+              <a:rPr sz="1050" b="1" i="0">
+                <a:solidFill>
+                  <a:srgbClr val="5B6964"/>
+                </a:solidFill>
+                <a:latin typeface="Arial"/>
+              </a:rPr>
+              <a:t>FLOOR PROTOCOL</a:t>
+            </a:r>
+          </a:p>
+        </p:txBody>
+      </p:sp>
+      <p:sp>
+        <p:nvSpPr>
+          <p:cNvPr id="11" name="TextBox 10"/>
+          <p:cNvSpPr txBox="1"/>
+          <p:nvPr/>
+        </p:nvSpPr>
+        <p:spPr>
+          <a:xfrm>
+            <a:off x="548640" y="3538728"/>
+            <a:ext cx="7406640" cy="731520"/>
+          </a:xfrm>
+          <a:prstGeom prst="rect">
+            <a:avLst/>
+          </a:prstGeom>
+          <a:noFill/>
+        </p:spPr>
+        <p:txBody>
+          <a:bodyPr wrap="square" lIns="0" rIns="0" tIns="0" bIns="0">
+            <a:spAutoFit/>
+          </a:bodyPr>
+          <a:lstStyle/>
+          <a:p>
+            <a:pPr marL="201168" indent="-201168">
+              <a:spcAft>
+                <a:spcPts val="500"/>
+              </a:spcAft>
+            </a:pPr>
+            <a:r>
+              <a:rPr sz="1350">
+                <a:solidFill>
+                  <a:srgbClr val="1E7568"/>
+                </a:solidFill>
+                <a:latin typeface="Arial"/>
+              </a:rPr>
+              <a:t>•  </a:t>
+            </a:r>
+            <a:r>
+              <a:rPr sz="1350" b="0">
+                <a:solidFill>
+                  <a:srgbClr val="18211F"/>
+                </a:solidFill>
+                <a:latin typeface="Arial"/>
+              </a:rPr>
+              <a:t>Rerun an identical condition 10× over 16 vignettes; count action changes per cell</a:t>
+            </a:r>
+          </a:p>
+          <a:p>
+            <a:pPr marL="201168" indent="-201168">
+              <a:spcAft>
+                <a:spcPts val="500"/>
+              </a:spcAft>
+            </a:pPr>
+            <a:r>
+              <a:rPr sz="1350">
+                <a:solidFill>
+                  <a:srgbClr val="1E7568"/>
+                </a:solidFill>
+                <a:latin typeface="Arial"/>
+              </a:rPr>
+              <a:t>•  </a:t>
+            </a:r>
+            <a:r>
+              <a:rPr sz="1350" b="0">
+                <a:solidFill>
+                  <a:srgbClr val="18211F"/>
+                </a:solidFill>
+                <a:latin typeface="Arial"/>
+              </a:rPr>
+              <a:t>Repeat on a second model; test majority vote over 5 draws</a:t>
+            </a:r>
+          </a:p>
+        </p:txBody>
+      </p:sp>
+      <p:sp>
+        <p:nvSpPr>
+          <p:cNvPr id="12" name="TextBox 11"/>
+          <p:cNvSpPr txBox="1"/>
+          <p:nvPr/>
+        </p:nvSpPr>
+        <p:spPr>
+          <a:xfrm>
+            <a:off x="548640" y="4379976"/>
+            <a:ext cx="7406640" cy="228600"/>
+          </a:xfrm>
+          <a:prstGeom prst="rect">
+            <a:avLst/>
+          </a:prstGeom>
+          <a:noFill/>
+        </p:spPr>
+        <p:txBody>
+          <a:bodyPr wrap="square" lIns="0" rIns="0" tIns="0" bIns="0" anchor="t">
+            <a:spAutoFit/>
+          </a:bodyPr>
+          <a:lstStyle/>
+          <a:p>
+            <a:pPr algn="l"/>
+            <a:r>
+              <a:rPr sz="1050" b="1" i="0">
+                <a:solidFill>
+                  <a:srgbClr val="5B6964"/>
+                </a:solidFill>
+                <a:latin typeface="Arial"/>
+              </a:rPr>
+              <a:t>FINDINGS</a:t>
+            </a:r>
+          </a:p>
+        </p:txBody>
+      </p:sp>
+      <p:sp>
+        <p:nvSpPr>
+          <p:cNvPr id="13" name="TextBox 12"/>
+          <p:cNvSpPr txBox="1"/>
+          <p:nvPr/>
+        </p:nvSpPr>
+        <p:spPr>
+          <a:xfrm>
+            <a:off x="548640" y="4654296"/>
+            <a:ext cx="7406640" cy="1188720"/>
+          </a:xfrm>
+          <a:prstGeom prst="rect">
+            <a:avLst/>
+          </a:prstGeom>
+          <a:noFill/>
+        </p:spPr>
+        <p:txBody>
+          <a:bodyPr wrap="square" lIns="0" rIns="0" tIns="0" bIns="0">
+            <a:spAutoFit/>
+          </a:bodyPr>
+          <a:lstStyle/>
+          <a:p>
+            <a:pPr marL="201168" indent="-201168">
+              <a:spcAft>
+                <a:spcPts val="500"/>
+              </a:spcAft>
+            </a:pPr>
+            <a:r>
+              <a:rPr sz="1350">
+                <a:solidFill>
+                  <a:srgbClr val="1E7568"/>
+                </a:solidFill>
+                <a:latin typeface="Arial"/>
+              </a:rPr>
+              <a:t>•  </a:t>
+            </a:r>
+            <a:r>
+              <a:rPr sz="1350" b="0">
+                <a:solidFill>
+                  <a:srgbClr val="18211F"/>
+                </a:solidFill>
+                <a:latin typeface="Arial"/>
+              </a:rPr>
+              <a:t>8.7% of actions change with nothing varied; 0.022 (ICU escalation) to 0.179 (substance caution)</a:t>
+            </a:r>
+          </a:p>
+          <a:p>
+            <a:pPr marL="201168" indent="-201168">
+              <a:spcAft>
+                <a:spcPts val="500"/>
+              </a:spcAft>
+            </a:pPr>
+            <a:r>
+              <a:rPr sz="1350">
+                <a:solidFill>
+                  <a:srgbClr val="1E7568"/>
+                </a:solidFill>
+                <a:latin typeface="Arial"/>
+              </a:rPr>
+              <a:t>•  </a:t>
+            </a:r>
+            <a:r>
+              <a:rPr sz="1350" b="0">
+                <a:solidFill>
+                  <a:srgbClr val="18211F"/>
+                </a:solidFill>
+                <a:latin typeface="Arial"/>
+              </a:rPr>
+              <a:t>Second model: 6.7% floor, same ranking of actions (Spearman 0.94)</a:t>
+            </a:r>
+          </a:p>
+          <a:p>
+            <a:pPr marL="201168" indent="-201168">
+              <a:spcAft>
+                <a:spcPts val="500"/>
+              </a:spcAft>
+            </a:pPr>
+            <a:r>
+              <a:rPr sz="1350">
+                <a:solidFill>
+                  <a:srgbClr val="1E7568"/>
+                </a:solidFill>
+                <a:latin typeface="Arial"/>
+              </a:rPr>
+              <a:t>•  </a:t>
+            </a:r>
+            <a:r>
+              <a:rPr sz="1350" b="0">
+                <a:solidFill>
+                  <a:srgbClr val="18211F"/>
+                </a:solidFill>
+                <a:latin typeface="Arial"/>
+              </a:rPr>
+              <a:t>Majority vote removes 39% of the floor, then flattens; no disparity beats the floor</a:t>
+            </a:r>
+          </a:p>
+        </p:txBody>
+      </p:sp>
+      <p:sp>
+        <p:nvSpPr>
+          <p:cNvPr id="14" name="Rectangle 13"/>
+          <p:cNvSpPr/>
+          <p:nvPr/>
+        </p:nvSpPr>
+        <p:spPr>
+          <a:xfrm>
+            <a:off x="8321040" y="1536192"/>
+            <a:ext cx="3319272" cy="4709160"/>
+          </a:xfrm>
+          <a:prstGeom prst="rect">
+            <a:avLst/>
+          </a:prstGeom>
+          <a:solidFill>
+            <a:srgbClr val="E3F0ED"/>
+          </a:solidFill>
+          <a:ln>
+            <a:noFill/>
+          </a:ln>
+          <a:effectLst/>
+        </p:spPr>
+        <p:style>
+          <a:lnRef idx="1">
+            <a:schemeClr val="accent1"/>
+          </a:lnRef>
+          <a:fillRef idx="3">
+            <a:schemeClr val="accent1"/>
+          </a:fillRef>
+          <a:effectRef idx="2">
+            <a:schemeClr val="accent1"/>
+          </a:effectRef>
+          <a:fontRef idx="minor">
+            <a:schemeClr val="lt1"/>
+          </a:fontRef>
+        </p:style>
+        <p:txBody>
+          <a:bodyPr rtlCol="0" anchor="ctr"/>
+          <a:lstStyle/>
+          <a:p>
+            <a:pPr algn="ctr"/>
+          </a:p>
+        </p:txBody>
+      </p:sp>
+      <p:sp>
+        <p:nvSpPr>
+          <p:cNvPr id="15" name="TextBox 14"/>
+          <p:cNvSpPr txBox="1"/>
+          <p:nvPr/>
+        </p:nvSpPr>
+        <p:spPr>
+          <a:xfrm>
+            <a:off x="8549640" y="1737360"/>
+            <a:ext cx="2880360" cy="457200"/>
+          </a:xfrm>
+          <a:prstGeom prst="rect">
+            <a:avLst/>
+          </a:prstGeom>
+          <a:noFill/>
+        </p:spPr>
+        <p:txBody>
+          <a:bodyPr wrap="square" lIns="0" rIns="0" tIns="0" bIns="0" anchor="t">
+            <a:spAutoFit/>
+          </a:bodyPr>
+          <a:lstStyle/>
+          <a:p>
+            <a:pPr algn="l"/>
+            <a:r>
+              <a:rPr sz="1050" b="1" i="0">
+                <a:solidFill>
+                  <a:srgbClr val="1E7568"/>
+                </a:solidFill>
+                <a:latin typeface="Arial"/>
+              </a:rPr>
+              <a:t>HOW THEY EVALUATE</a:t>
+            </a:r>
+          </a:p>
+        </p:txBody>
+      </p:sp>
+      <p:sp>
+        <p:nvSpPr>
+          <p:cNvPr id="16" name="TextBox 15"/>
+          <p:cNvSpPr txBox="1"/>
+          <p:nvPr/>
+        </p:nvSpPr>
+        <p:spPr>
+          <a:xfrm>
+            <a:off x="8549640" y="2103120"/>
+            <a:ext cx="2880360" cy="4023360"/>
+          </a:xfrm>
+          <a:prstGeom prst="rect">
+            <a:avLst/>
+          </a:prstGeom>
+          <a:noFill/>
+        </p:spPr>
+        <p:txBody>
           <a:bodyPr wrap="square" lIns="0" rIns="0" tIns="0" bIns="0">
             <a:spAutoFit/>
           </a:bodyPr>
@@ -8982,12 +9248,16 @@
               <a:spcAft>
                 <a:spcPts val="800"/>
               </a:spcAft>
-              <a:buClr>
-                <a:srgbClr val="1E7568"/>
-              </a:buClr>
-              <a:buFont typeface="Arial"/>
-              <a:buChar char="•"/>
             </a:pPr>
+            <a:r>
+              <a:rPr sz="1300">
+                <a:solidFill>
+                  <a:srgbClr val="1E7568"/>
+                </a:solidFill>
+                <a:latin typeface="Arial"/>
+              </a:rPr>
+              <a:t>•  </a:t>
+            </a:r>
             <a:r>
               <a:rPr sz="1300" b="0">
                 <a:solidFill>
@@ -9003,12 +9273,16 @@
               <a:spcAft>
                 <a:spcPts val="800"/>
               </a:spcAft>
-              <a:buClr>
-                <a:srgbClr val="1E7568"/>
-              </a:buClr>
-              <a:buFont typeface="Arial"/>
-              <a:buChar char="•"/>
             </a:pPr>
+            <a:r>
+              <a:rPr sz="1300">
+                <a:solidFill>
+                  <a:srgbClr val="1E7568"/>
+                </a:solidFill>
+                <a:latin typeface="Arial"/>
+              </a:rPr>
+              <a:t>•  </a:t>
+            </a:r>
             <a:r>
               <a:rPr sz="1300" b="0">
                 <a:solidFill>
@@ -9024,12 +9298,16 @@
               <a:spcAft>
                 <a:spcPts val="800"/>
               </a:spcAft>
-              <a:buClr>
-                <a:srgbClr val="1E7568"/>
-              </a:buClr>
-              <a:buFont typeface="Arial"/>
-              <a:buChar char="•"/>
             </a:pPr>
+            <a:r>
+              <a:rPr sz="1300">
+                <a:solidFill>
+                  <a:srgbClr val="1E7568"/>
+                </a:solidFill>
+                <a:latin typeface="Arial"/>
+              </a:rPr>
+              <a:t>•  </a:t>
+            </a:r>
             <a:r>
               <a:rPr sz="1300" b="0">
                 <a:solidFill>
@@ -9045,12 +9323,16 @@
               <a:spcAft>
                 <a:spcPts val="800"/>
               </a:spcAft>
-              <a:buClr>
-                <a:srgbClr val="1E7568"/>
-              </a:buClr>
-              <a:buFont typeface="Arial"/>
-              <a:buChar char="•"/>
             </a:pPr>
+            <a:r>
+              <a:rPr sz="1300">
+                <a:solidFill>
+                  <a:srgbClr val="1E7568"/>
+                </a:solidFill>
+                <a:latin typeface="Arial"/>
+              </a:rPr>
+              <a:t>•  </a:t>
+            </a:r>
             <a:r>
               <a:rPr sz="1300" b="1">
                 <a:solidFill>
@@ -9168,41 +9450,50 @@
           </a:p>
         </p:txBody>
       </p:sp>
-      <p:cxnSp>
-        <p:nvCxnSpPr>
-          <p:cNvPr id="4" name="Connector 3"/>
-          <p:cNvCxnSpPr/>
+      <p:sp>
+        <p:nvSpPr>
+          <p:cNvPr id="4" name="Rectangle 3"/>
+          <p:cNvSpPr/>
           <p:nvPr/>
-        </p:nvCxnSpPr>
+        </p:nvSpPr>
         <p:spPr>
           <a:xfrm>
             <a:off x="548640" y="1325880"/>
-            <a:ext cx="11091672" cy="0"/>
-          </a:xfrm>
-          <a:prstGeom prst="line">
+            <a:ext cx="11091672" cy="10972"/>
+          </a:xfrm>
+          <a:prstGeom prst="rect">
             <a:avLst/>
           </a:prstGeom>
-          <a:ln w="9525">
-            <a:solidFill>
-              <a:srgbClr val="C6D0CC"/>
-            </a:solidFill>
+          <a:solidFill>
+            <a:srgbClr val="C6D0CC"/>
+          </a:solidFill>
+          <a:ln>
+            <a:noFill/>
           </a:ln>
+          <a:effectLst/>
         </p:spPr>
         <p:style>
-          <a:lnRef idx="2">
+          <a:lnRef idx="1">
             <a:schemeClr val="accent1"/>
           </a:lnRef>
-          <a:fillRef idx="0">
+          <a:fillRef idx="3">
             <a:schemeClr val="accent1"/>
           </a:fillRef>
-          <a:effectRef idx="1">
+          <a:effectRef idx="2">
             <a:schemeClr val="accent1"/>
           </a:effectRef>
           <a:fontRef idx="minor">
-            <a:schemeClr val="tx1"/>
+            <a:schemeClr val="lt1"/>
           </a:fontRef>
         </p:style>
-      </p:cxnSp>
+        <p:txBody>
+          <a:bodyPr rtlCol="0" anchor="ctr"/>
+          <a:lstStyle/>
+          <a:p>
+            <a:pPr algn="ctr"/>
+          </a:p>
+        </p:txBody>
+      </p:sp>
       <p:sp>
         <p:nvSpPr>
           <p:cNvPr id="5" name="TextBox 4"/>
@@ -10822,41 +11113,50 @@
           </a:p>
         </p:txBody>
       </p:sp>
-      <p:cxnSp>
-        <p:nvCxnSpPr>
-          <p:cNvPr id="4" name="Connector 3"/>
-          <p:cNvCxnSpPr/>
+      <p:sp>
+        <p:nvSpPr>
+          <p:cNvPr id="4" name="Rectangle 3"/>
+          <p:cNvSpPr/>
           <p:nvPr/>
-        </p:nvCxnSpPr>
+        </p:nvSpPr>
         <p:spPr>
           <a:xfrm>
             <a:off x="548640" y="1325880"/>
-            <a:ext cx="11091672" cy="0"/>
-          </a:xfrm>
-          <a:prstGeom prst="line">
+            <a:ext cx="11091672" cy="10972"/>
+          </a:xfrm>
+          <a:prstGeom prst="rect">
             <a:avLst/>
           </a:prstGeom>
-          <a:ln w="9525">
-            <a:solidFill>
-              <a:srgbClr val="C6D0CC"/>
-            </a:solidFill>
+          <a:solidFill>
+            <a:srgbClr val="C6D0CC"/>
+          </a:solidFill>
+          <a:ln>
+            <a:noFill/>
           </a:ln>
+          <a:effectLst/>
         </p:spPr>
         <p:style>
-          <a:lnRef idx="2">
+          <a:lnRef idx="1">
             <a:schemeClr val="accent1"/>
           </a:lnRef>
-          <a:fillRef idx="0">
+          <a:fillRef idx="3">
             <a:schemeClr val="accent1"/>
           </a:fillRef>
-          <a:effectRef idx="1">
+          <a:effectRef idx="2">
             <a:schemeClr val="accent1"/>
           </a:effectRef>
           <a:fontRef idx="minor">
-            <a:schemeClr val="tx1"/>
+            <a:schemeClr val="lt1"/>
           </a:fontRef>
         </p:style>
-      </p:cxnSp>
+        <p:txBody>
+          <a:bodyPr rtlCol="0" anchor="ctr"/>
+          <a:lstStyle/>
+          <a:p>
+            <a:pPr algn="ctr"/>
+          </a:p>
+        </p:txBody>
+      </p:sp>
       <p:sp>
         <p:nvSpPr>
           <p:cNvPr id="5" name="TextBox 4"/>
